--- a/docs/pptx/carbo/ritu-carbo-linsubhr-sens-grade2_10pct.pptx
+++ b/docs/pptx/carbo/ritu-carbo-linsubhr-sens-grade2_10pct.pptx
@@ -2443,7 +2443,7 @@
           </p:nvSpPr>
           <p:spPr>
             <a:xfrm>
-              <a:off x="1325501" y="2073503"/>
+              <a:off x="1325928" y="2073503"/>
               <a:ext cx="0" cy="3649639"/>
             </a:xfrm>
             <a:custGeom>
@@ -2486,7 +2486,7 @@
           </p:nvSpPr>
           <p:spPr>
             <a:xfrm>
-              <a:off x="2239092" y="2073503"/>
+              <a:off x="2237914" y="2073503"/>
               <a:ext cx="0" cy="3649639"/>
             </a:xfrm>
             <a:custGeom>
@@ -2529,7 +2529,7 @@
           </p:nvSpPr>
           <p:spPr>
             <a:xfrm>
-              <a:off x="3152683" y="2073503"/>
+              <a:off x="3149900" y="2073503"/>
               <a:ext cx="0" cy="3649639"/>
             </a:xfrm>
             <a:custGeom>
@@ -2572,7 +2572,7 @@
           </p:nvSpPr>
           <p:spPr>
             <a:xfrm>
-              <a:off x="4066274" y="2073503"/>
+              <a:off x="4061886" y="2073503"/>
               <a:ext cx="0" cy="3649639"/>
             </a:xfrm>
             <a:custGeom>
@@ -2615,7 +2615,7 @@
           </p:nvSpPr>
           <p:spPr>
             <a:xfrm>
-              <a:off x="4979865" y="2073503"/>
+              <a:off x="4973872" y="2073503"/>
               <a:ext cx="0" cy="3649639"/>
             </a:xfrm>
             <a:custGeom>
@@ -2658,7 +2658,7 @@
           </p:nvSpPr>
           <p:spPr>
             <a:xfrm>
-              <a:off x="5893456" y="2073503"/>
+              <a:off x="5885859" y="2073503"/>
               <a:ext cx="0" cy="3649639"/>
             </a:xfrm>
             <a:custGeom>
@@ -2701,7 +2701,7 @@
           </p:nvSpPr>
           <p:spPr>
             <a:xfrm>
-              <a:off x="6807046" y="2073503"/>
+              <a:off x="6797845" y="2073503"/>
               <a:ext cx="0" cy="3649639"/>
             </a:xfrm>
             <a:custGeom>
@@ -2744,7 +2744,7 @@
           </p:nvSpPr>
           <p:spPr>
             <a:xfrm>
-              <a:off x="7720637" y="2073503"/>
+              <a:off x="7709831" y="2073503"/>
               <a:ext cx="0" cy="3649639"/>
             </a:xfrm>
             <a:custGeom>
@@ -3002,7 +3002,7 @@
           </p:nvSpPr>
           <p:spPr>
             <a:xfrm>
-              <a:off x="868706" y="2073503"/>
+              <a:off x="869934" y="2073503"/>
               <a:ext cx="0" cy="3649639"/>
             </a:xfrm>
             <a:custGeom>
@@ -3045,7 +3045,7 @@
           </p:nvSpPr>
           <p:spPr>
             <a:xfrm>
-              <a:off x="1782297" y="2073503"/>
+              <a:off x="1781921" y="2073503"/>
               <a:ext cx="0" cy="3649639"/>
             </a:xfrm>
             <a:custGeom>
@@ -3088,7 +3088,7 @@
           </p:nvSpPr>
           <p:spPr>
             <a:xfrm>
-              <a:off x="2695888" y="2073503"/>
+              <a:off x="2693907" y="2073503"/>
               <a:ext cx="0" cy="3649639"/>
             </a:xfrm>
             <a:custGeom>
@@ -3131,7 +3131,7 @@
           </p:nvSpPr>
           <p:spPr>
             <a:xfrm>
-              <a:off x="3609478" y="2073503"/>
+              <a:off x="3605893" y="2073503"/>
               <a:ext cx="0" cy="3649639"/>
             </a:xfrm>
             <a:custGeom>
@@ -3174,7 +3174,7 @@
           </p:nvSpPr>
           <p:spPr>
             <a:xfrm>
-              <a:off x="4523069" y="2073503"/>
+              <a:off x="4517879" y="2073503"/>
               <a:ext cx="0" cy="3649639"/>
             </a:xfrm>
             <a:custGeom>
@@ -3217,7 +3217,7 @@
           </p:nvSpPr>
           <p:spPr>
             <a:xfrm>
-              <a:off x="5436660" y="2073503"/>
+              <a:off x="5429866" y="2073503"/>
               <a:ext cx="0" cy="3649639"/>
             </a:xfrm>
             <a:custGeom>
@@ -3260,7 +3260,7 @@
           </p:nvSpPr>
           <p:spPr>
             <a:xfrm>
-              <a:off x="6350251" y="2073503"/>
+              <a:off x="6341852" y="2073503"/>
               <a:ext cx="0" cy="3649639"/>
             </a:xfrm>
             <a:custGeom>
@@ -3303,7 +3303,7 @@
           </p:nvSpPr>
           <p:spPr>
             <a:xfrm>
-              <a:off x="7263842" y="2073503"/>
+              <a:off x="7253838" y="2073503"/>
               <a:ext cx="0" cy="3649639"/>
             </a:xfrm>
             <a:custGeom>
@@ -3346,7 +3346,7 @@
           </p:nvSpPr>
           <p:spPr>
             <a:xfrm>
-              <a:off x="8177433" y="2073503"/>
+              <a:off x="8165824" y="2073503"/>
               <a:ext cx="0" cy="3649639"/>
             </a:xfrm>
             <a:custGeom>
@@ -3389,612 +3389,612 @@
           </p:nvSpPr>
           <p:spPr>
             <a:xfrm>
-              <a:off x="1172049" y="2711851"/>
-              <a:ext cx="7090630" cy="2617738"/>
+              <a:off x="1172049" y="2696581"/>
+              <a:ext cx="7090630" cy="2631670"/>
             </a:xfrm>
             <a:custGeom>
               <a:avLst/>
               <a:pathLst>
-                <a:path w="7090630" h="2617738">
+                <a:path w="7090630" h="2631670">
                   <a:moveTo>
                     <a:pt x="0" y="0"/>
                   </a:moveTo>
                   <a:lnTo>
-                    <a:pt x="71622" y="71671"/>
-                  </a:lnTo>
-                  <a:lnTo>
-                    <a:pt x="143245" y="141537"/>
-                  </a:lnTo>
-                  <a:lnTo>
-                    <a:pt x="214867" y="209643"/>
-                  </a:lnTo>
-                  <a:lnTo>
-                    <a:pt x="286490" y="276034"/>
-                  </a:lnTo>
-                  <a:lnTo>
-                    <a:pt x="358112" y="340753"/>
-                  </a:lnTo>
-                  <a:lnTo>
-                    <a:pt x="429735" y="403841"/>
-                  </a:lnTo>
-                  <a:lnTo>
-                    <a:pt x="501357" y="465340"/>
-                  </a:lnTo>
-                  <a:lnTo>
-                    <a:pt x="572980" y="525290"/>
-                  </a:lnTo>
-                  <a:lnTo>
-                    <a:pt x="644602" y="583730"/>
-                  </a:lnTo>
-                  <a:lnTo>
-                    <a:pt x="716225" y="640698"/>
-                  </a:lnTo>
-                  <a:lnTo>
-                    <a:pt x="787847" y="696231"/>
-                  </a:lnTo>
-                  <a:lnTo>
-                    <a:pt x="859470" y="750366"/>
-                  </a:lnTo>
-                  <a:lnTo>
-                    <a:pt x="931092" y="803137"/>
-                  </a:lnTo>
-                  <a:lnTo>
-                    <a:pt x="1002715" y="854578"/>
-                  </a:lnTo>
-                  <a:lnTo>
-                    <a:pt x="1074337" y="904724"/>
-                  </a:lnTo>
-                  <a:lnTo>
-                    <a:pt x="1145960" y="953607"/>
-                  </a:lnTo>
-                  <a:lnTo>
-                    <a:pt x="1217582" y="1001258"/>
-                  </a:lnTo>
-                  <a:lnTo>
-                    <a:pt x="1289205" y="1047709"/>
-                  </a:lnTo>
-                  <a:lnTo>
-                    <a:pt x="1360827" y="1092990"/>
-                  </a:lnTo>
-                  <a:lnTo>
-                    <a:pt x="1432450" y="1137131"/>
-                  </a:lnTo>
-                  <a:lnTo>
-                    <a:pt x="1504073" y="1180160"/>
-                  </a:lnTo>
-                  <a:lnTo>
-                    <a:pt x="1575695" y="1222105"/>
-                  </a:lnTo>
-                  <a:lnTo>
-                    <a:pt x="1647318" y="1262993"/>
-                  </a:lnTo>
-                  <a:lnTo>
-                    <a:pt x="1718940" y="1302851"/>
-                  </a:lnTo>
-                  <a:lnTo>
-                    <a:pt x="1790563" y="1341706"/>
-                  </a:lnTo>
-                  <a:lnTo>
-                    <a:pt x="1862185" y="1379582"/>
-                  </a:lnTo>
-                  <a:lnTo>
-                    <a:pt x="1933808" y="1416503"/>
-                  </a:lnTo>
-                  <a:lnTo>
-                    <a:pt x="2005430" y="1452495"/>
-                  </a:lnTo>
-                  <a:lnTo>
-                    <a:pt x="2077053" y="1487580"/>
-                  </a:lnTo>
-                  <a:lnTo>
-                    <a:pt x="2148675" y="1521782"/>
-                  </a:lnTo>
-                  <a:lnTo>
-                    <a:pt x="2220298" y="1555122"/>
-                  </a:lnTo>
-                  <a:lnTo>
-                    <a:pt x="2291920" y="1587622"/>
-                  </a:lnTo>
-                  <a:lnTo>
-                    <a:pt x="2363543" y="1619303"/>
-                  </a:lnTo>
-                  <a:lnTo>
-                    <a:pt x="2435165" y="1650187"/>
-                  </a:lnTo>
-                  <a:lnTo>
-                    <a:pt x="2506788" y="1680292"/>
-                  </a:lnTo>
-                  <a:lnTo>
-                    <a:pt x="2578410" y="1709640"/>
-                  </a:lnTo>
-                  <a:lnTo>
-                    <a:pt x="2650033" y="1738248"/>
-                  </a:lnTo>
-                  <a:lnTo>
-                    <a:pt x="2721655" y="1766135"/>
-                  </a:lnTo>
-                  <a:lnTo>
-                    <a:pt x="2793278" y="1793320"/>
-                  </a:lnTo>
-                  <a:lnTo>
-                    <a:pt x="2864901" y="1819821"/>
-                  </a:lnTo>
-                  <a:lnTo>
-                    <a:pt x="2936523" y="1845653"/>
-                  </a:lnTo>
-                  <a:lnTo>
-                    <a:pt x="3008146" y="1870835"/>
-                  </a:lnTo>
-                  <a:lnTo>
-                    <a:pt x="3079768" y="1895383"/>
-                  </a:lnTo>
-                  <a:lnTo>
-                    <a:pt x="3151391" y="1919313"/>
-                  </a:lnTo>
-                  <a:lnTo>
-                    <a:pt x="3223013" y="1942639"/>
-                  </a:lnTo>
-                  <a:lnTo>
-                    <a:pt x="3294636" y="1965379"/>
-                  </a:lnTo>
-                  <a:lnTo>
-                    <a:pt x="3366258" y="1987545"/>
-                  </a:lnTo>
-                  <a:lnTo>
-                    <a:pt x="3437881" y="2009153"/>
-                  </a:lnTo>
-                  <a:lnTo>
-                    <a:pt x="3509503" y="2015687"/>
-                  </a:lnTo>
-                  <a:lnTo>
-                    <a:pt x="3581126" y="2015325"/>
-                  </a:lnTo>
-                  <a:lnTo>
-                    <a:pt x="3652748" y="2014962"/>
-                  </a:lnTo>
-                  <a:lnTo>
-                    <a:pt x="3724371" y="2014599"/>
-                  </a:lnTo>
-                  <a:lnTo>
-                    <a:pt x="3795993" y="2014236"/>
-                  </a:lnTo>
-                  <a:lnTo>
-                    <a:pt x="3867616" y="2013872"/>
-                  </a:lnTo>
-                  <a:lnTo>
-                    <a:pt x="3939238" y="2013509"/>
-                  </a:lnTo>
-                  <a:lnTo>
-                    <a:pt x="4010861" y="2013145"/>
-                  </a:lnTo>
-                  <a:lnTo>
-                    <a:pt x="4082483" y="2012781"/>
-                  </a:lnTo>
-                  <a:lnTo>
-                    <a:pt x="4154106" y="2012418"/>
-                  </a:lnTo>
-                  <a:lnTo>
-                    <a:pt x="4225729" y="2012053"/>
-                  </a:lnTo>
-                  <a:lnTo>
-                    <a:pt x="4297351" y="2011689"/>
-                  </a:lnTo>
-                  <a:lnTo>
-                    <a:pt x="4368974" y="2011325"/>
-                  </a:lnTo>
-                  <a:lnTo>
-                    <a:pt x="4440596" y="2010960"/>
-                  </a:lnTo>
-                  <a:lnTo>
-                    <a:pt x="4512219" y="2010595"/>
-                  </a:lnTo>
-                  <a:lnTo>
-                    <a:pt x="4583841" y="2010231"/>
-                  </a:lnTo>
-                  <a:lnTo>
-                    <a:pt x="4655464" y="2009866"/>
-                  </a:lnTo>
-                  <a:lnTo>
-                    <a:pt x="4727086" y="2009500"/>
-                  </a:lnTo>
-                  <a:lnTo>
-                    <a:pt x="4798709" y="2009135"/>
-                  </a:lnTo>
-                  <a:lnTo>
-                    <a:pt x="4870331" y="2008769"/>
-                  </a:lnTo>
-                  <a:lnTo>
-                    <a:pt x="4941954" y="2008404"/>
-                  </a:lnTo>
-                  <a:lnTo>
-                    <a:pt x="5013576" y="2008038"/>
-                  </a:lnTo>
-                  <a:lnTo>
-                    <a:pt x="5085199" y="2007672"/>
-                  </a:lnTo>
-                  <a:lnTo>
-                    <a:pt x="5156821" y="2007306"/>
-                  </a:lnTo>
-                  <a:lnTo>
-                    <a:pt x="5228444" y="2006939"/>
-                  </a:lnTo>
-                  <a:lnTo>
-                    <a:pt x="5300066" y="2006573"/>
-                  </a:lnTo>
-                  <a:lnTo>
-                    <a:pt x="5371689" y="2006206"/>
-                  </a:lnTo>
-                  <a:lnTo>
-                    <a:pt x="5443311" y="2005839"/>
-                  </a:lnTo>
-                  <a:lnTo>
-                    <a:pt x="5514934" y="2005472"/>
-                  </a:lnTo>
-                  <a:lnTo>
-                    <a:pt x="5586557" y="2005105"/>
-                  </a:lnTo>
-                  <a:lnTo>
-                    <a:pt x="5658179" y="2004738"/>
-                  </a:lnTo>
-                  <a:lnTo>
-                    <a:pt x="5729802" y="2004371"/>
-                  </a:lnTo>
-                  <a:lnTo>
-                    <a:pt x="5801424" y="2004003"/>
-                  </a:lnTo>
-                  <a:lnTo>
-                    <a:pt x="5873047" y="2003635"/>
-                  </a:lnTo>
-                  <a:lnTo>
-                    <a:pt x="5944669" y="2003267"/>
-                  </a:lnTo>
-                  <a:lnTo>
-                    <a:pt x="6016292" y="2002899"/>
-                  </a:lnTo>
-                  <a:lnTo>
-                    <a:pt x="6087914" y="2002531"/>
-                  </a:lnTo>
-                  <a:lnTo>
-                    <a:pt x="6159537" y="2002163"/>
-                  </a:lnTo>
-                  <a:lnTo>
-                    <a:pt x="6231159" y="2001794"/>
-                  </a:lnTo>
-                  <a:lnTo>
-                    <a:pt x="6302782" y="2001425"/>
-                  </a:lnTo>
-                  <a:lnTo>
-                    <a:pt x="6374404" y="2001056"/>
-                  </a:lnTo>
-                  <a:lnTo>
-                    <a:pt x="6446027" y="2000687"/>
-                  </a:lnTo>
-                  <a:lnTo>
-                    <a:pt x="6517649" y="2000318"/>
-                  </a:lnTo>
-                  <a:lnTo>
-                    <a:pt x="6589272" y="1999949"/>
-                  </a:lnTo>
-                  <a:lnTo>
-                    <a:pt x="6660894" y="1999579"/>
-                  </a:lnTo>
-                  <a:lnTo>
-                    <a:pt x="6732517" y="1999209"/>
-                  </a:lnTo>
-                  <a:lnTo>
-                    <a:pt x="6804139" y="1998840"/>
-                  </a:lnTo>
-                  <a:lnTo>
-                    <a:pt x="6875762" y="1998470"/>
-                  </a:lnTo>
-                  <a:lnTo>
-                    <a:pt x="6947385" y="1998099"/>
-                  </a:lnTo>
-                  <a:lnTo>
-                    <a:pt x="7019007" y="1997729"/>
-                  </a:lnTo>
-                  <a:lnTo>
-                    <a:pt x="7090630" y="1997358"/>
-                  </a:lnTo>
-                  <a:lnTo>
-                    <a:pt x="7090630" y="2617738"/>
-                  </a:lnTo>
-                  <a:lnTo>
-                    <a:pt x="7019007" y="2611856"/>
-                  </a:lnTo>
-                  <a:lnTo>
-                    <a:pt x="6947385" y="2605821"/>
-                  </a:lnTo>
-                  <a:lnTo>
-                    <a:pt x="6875762" y="2599631"/>
-                  </a:lnTo>
-                  <a:lnTo>
-                    <a:pt x="6804139" y="2593280"/>
-                  </a:lnTo>
-                  <a:lnTo>
-                    <a:pt x="6732517" y="2586766"/>
-                  </a:lnTo>
-                  <a:lnTo>
-                    <a:pt x="6660894" y="2580083"/>
-                  </a:lnTo>
-                  <a:lnTo>
-                    <a:pt x="6589272" y="2573227"/>
-                  </a:lnTo>
-                  <a:lnTo>
-                    <a:pt x="6517649" y="2566194"/>
-                  </a:lnTo>
-                  <a:lnTo>
-                    <a:pt x="6446027" y="2558980"/>
-                  </a:lnTo>
-                  <a:lnTo>
-                    <a:pt x="6374404" y="2551579"/>
-                  </a:lnTo>
-                  <a:lnTo>
-                    <a:pt x="6302782" y="2543987"/>
-                  </a:lnTo>
-                  <a:lnTo>
-                    <a:pt x="6231159" y="2536199"/>
-                  </a:lnTo>
-                  <a:lnTo>
-                    <a:pt x="6159537" y="2528209"/>
-                  </a:lnTo>
-                  <a:lnTo>
-                    <a:pt x="6087914" y="2520013"/>
-                  </a:lnTo>
-                  <a:lnTo>
-                    <a:pt x="6016292" y="2511605"/>
-                  </a:lnTo>
-                  <a:lnTo>
-                    <a:pt x="5944669" y="2502980"/>
-                  </a:lnTo>
-                  <a:lnTo>
-                    <a:pt x="5873047" y="2494133"/>
-                  </a:lnTo>
-                  <a:lnTo>
-                    <a:pt x="5801424" y="2485056"/>
-                  </a:lnTo>
-                  <a:lnTo>
-                    <a:pt x="5729802" y="2475745"/>
-                  </a:lnTo>
-                  <a:lnTo>
-                    <a:pt x="5658179" y="2466194"/>
-                  </a:lnTo>
-                  <a:lnTo>
-                    <a:pt x="5586557" y="2456395"/>
-                  </a:lnTo>
-                  <a:lnTo>
-                    <a:pt x="5514934" y="2446344"/>
-                  </a:lnTo>
-                  <a:lnTo>
-                    <a:pt x="5443311" y="2436032"/>
-                  </a:lnTo>
-                  <a:lnTo>
-                    <a:pt x="5371689" y="2425455"/>
-                  </a:lnTo>
-                  <a:lnTo>
-                    <a:pt x="5300066" y="2414603"/>
-                  </a:lnTo>
-                  <a:lnTo>
-                    <a:pt x="5228444" y="2403472"/>
-                  </a:lnTo>
-                  <a:lnTo>
-                    <a:pt x="5156821" y="2392053"/>
-                  </a:lnTo>
-                  <a:lnTo>
-                    <a:pt x="5085199" y="2380339"/>
-                  </a:lnTo>
-                  <a:lnTo>
-                    <a:pt x="5013576" y="2368322"/>
-                  </a:lnTo>
-                  <a:lnTo>
-                    <a:pt x="4941954" y="2355995"/>
-                  </a:lnTo>
-                  <a:lnTo>
-                    <a:pt x="4870331" y="2343349"/>
-                  </a:lnTo>
-                  <a:lnTo>
-                    <a:pt x="4798709" y="2330376"/>
-                  </a:lnTo>
-                  <a:lnTo>
-                    <a:pt x="4727086" y="2317068"/>
-                  </a:lnTo>
-                  <a:lnTo>
-                    <a:pt x="4655464" y="2303417"/>
-                  </a:lnTo>
-                  <a:lnTo>
-                    <a:pt x="4583841" y="2289412"/>
-                  </a:lnTo>
-                  <a:lnTo>
-                    <a:pt x="4512219" y="2275046"/>
-                  </a:lnTo>
-                  <a:lnTo>
-                    <a:pt x="4440596" y="2260308"/>
-                  </a:lnTo>
-                  <a:lnTo>
-                    <a:pt x="4368974" y="2245190"/>
-                  </a:lnTo>
-                  <a:lnTo>
-                    <a:pt x="4297351" y="2229681"/>
-                  </a:lnTo>
-                  <a:lnTo>
-                    <a:pt x="4225729" y="2213771"/>
-                  </a:lnTo>
-                  <a:lnTo>
-                    <a:pt x="4154106" y="2197450"/>
-                  </a:lnTo>
-                  <a:lnTo>
-                    <a:pt x="4082483" y="2180708"/>
-                  </a:lnTo>
-                  <a:lnTo>
-                    <a:pt x="4010861" y="2163533"/>
-                  </a:lnTo>
-                  <a:lnTo>
-                    <a:pt x="3939238" y="2145914"/>
-                  </a:lnTo>
-                  <a:lnTo>
-                    <a:pt x="3867616" y="2127839"/>
-                  </a:lnTo>
-                  <a:lnTo>
-                    <a:pt x="3795993" y="2109298"/>
-                  </a:lnTo>
-                  <a:lnTo>
-                    <a:pt x="3724371" y="2090278"/>
-                  </a:lnTo>
-                  <a:lnTo>
-                    <a:pt x="3652748" y="2070766"/>
-                  </a:lnTo>
-                  <a:lnTo>
-                    <a:pt x="3581126" y="2050750"/>
-                  </a:lnTo>
-                  <a:lnTo>
-                    <a:pt x="3509503" y="2030217"/>
-                  </a:lnTo>
-                  <a:lnTo>
-                    <a:pt x="3437881" y="2016050"/>
-                  </a:lnTo>
-                  <a:lnTo>
-                    <a:pt x="3366258" y="2016412"/>
-                  </a:lnTo>
-                  <a:lnTo>
-                    <a:pt x="3294636" y="2016774"/>
-                  </a:lnTo>
-                  <a:lnTo>
-                    <a:pt x="3223013" y="2017136"/>
-                  </a:lnTo>
-                  <a:lnTo>
-                    <a:pt x="3151391" y="2017498"/>
-                  </a:lnTo>
-                  <a:lnTo>
-                    <a:pt x="3079768" y="2017860"/>
-                  </a:lnTo>
-                  <a:lnTo>
-                    <a:pt x="3008146" y="2018221"/>
-                  </a:lnTo>
-                  <a:lnTo>
-                    <a:pt x="2936523" y="2018583"/>
-                  </a:lnTo>
-                  <a:lnTo>
-                    <a:pt x="2864901" y="2018944"/>
-                  </a:lnTo>
-                  <a:lnTo>
-                    <a:pt x="2793278" y="2019305"/>
-                  </a:lnTo>
-                  <a:lnTo>
-                    <a:pt x="2721655" y="2019666"/>
-                  </a:lnTo>
-                  <a:lnTo>
-                    <a:pt x="2650033" y="2020027"/>
-                  </a:lnTo>
-                  <a:lnTo>
-                    <a:pt x="2578410" y="2020387"/>
-                  </a:lnTo>
-                  <a:lnTo>
-                    <a:pt x="2506788" y="2020748"/>
-                  </a:lnTo>
-                  <a:lnTo>
-                    <a:pt x="2435165" y="2021108"/>
-                  </a:lnTo>
-                  <a:lnTo>
-                    <a:pt x="2363543" y="2021468"/>
-                  </a:lnTo>
-                  <a:lnTo>
-                    <a:pt x="2291920" y="2021828"/>
-                  </a:lnTo>
-                  <a:lnTo>
-                    <a:pt x="2220298" y="2022188"/>
-                  </a:lnTo>
-                  <a:lnTo>
-                    <a:pt x="2148675" y="2022548"/>
-                  </a:lnTo>
-                  <a:lnTo>
-                    <a:pt x="2077053" y="2022907"/>
-                  </a:lnTo>
-                  <a:lnTo>
-                    <a:pt x="2005430" y="2023267"/>
-                  </a:lnTo>
-                  <a:lnTo>
-                    <a:pt x="1933808" y="2023626"/>
-                  </a:lnTo>
-                  <a:lnTo>
-                    <a:pt x="1862185" y="2023985"/>
-                  </a:lnTo>
-                  <a:lnTo>
-                    <a:pt x="1790563" y="2024344"/>
-                  </a:lnTo>
-                  <a:lnTo>
-                    <a:pt x="1718940" y="2024702"/>
-                  </a:lnTo>
-                  <a:lnTo>
-                    <a:pt x="1647318" y="2025061"/>
-                  </a:lnTo>
-                  <a:lnTo>
-                    <a:pt x="1575695" y="2025419"/>
-                  </a:lnTo>
-                  <a:lnTo>
-                    <a:pt x="1504073" y="2025778"/>
-                  </a:lnTo>
-                  <a:lnTo>
-                    <a:pt x="1432450" y="2026136"/>
-                  </a:lnTo>
-                  <a:lnTo>
-                    <a:pt x="1360827" y="2026494"/>
-                  </a:lnTo>
-                  <a:lnTo>
-                    <a:pt x="1289205" y="2026852"/>
-                  </a:lnTo>
-                  <a:lnTo>
-                    <a:pt x="1217582" y="2027209"/>
-                  </a:lnTo>
-                  <a:lnTo>
-                    <a:pt x="1145960" y="2027567"/>
-                  </a:lnTo>
-                  <a:lnTo>
-                    <a:pt x="1074337" y="2027924"/>
-                  </a:lnTo>
-                  <a:lnTo>
-                    <a:pt x="1002715" y="2028281"/>
-                  </a:lnTo>
-                  <a:lnTo>
-                    <a:pt x="931092" y="2028638"/>
-                  </a:lnTo>
-                  <a:lnTo>
-                    <a:pt x="859470" y="2028995"/>
-                  </a:lnTo>
-                  <a:lnTo>
-                    <a:pt x="787847" y="2029352"/>
-                  </a:lnTo>
-                  <a:lnTo>
-                    <a:pt x="716225" y="2029708"/>
-                  </a:lnTo>
-                  <a:lnTo>
-                    <a:pt x="644602" y="2030065"/>
-                  </a:lnTo>
-                  <a:lnTo>
-                    <a:pt x="572980" y="2030421"/>
-                  </a:lnTo>
-                  <a:lnTo>
-                    <a:pt x="501357" y="2030777"/>
-                  </a:lnTo>
-                  <a:lnTo>
-                    <a:pt x="429735" y="2031133"/>
-                  </a:lnTo>
-                  <a:lnTo>
-                    <a:pt x="358112" y="2031489"/>
-                  </a:lnTo>
-                  <a:lnTo>
-                    <a:pt x="286490" y="2031844"/>
-                  </a:lnTo>
-                  <a:lnTo>
-                    <a:pt x="214867" y="2032200"/>
-                  </a:lnTo>
-                  <a:lnTo>
-                    <a:pt x="143245" y="2032555"/>
-                  </a:lnTo>
-                  <a:lnTo>
-                    <a:pt x="71622" y="2032910"/>
-                  </a:lnTo>
-                  <a:lnTo>
-                    <a:pt x="0" y="2033265"/>
+                    <a:pt x="71622" y="72041"/>
+                  </a:lnTo>
+                  <a:lnTo>
+                    <a:pt x="143245" y="142268"/>
+                  </a:lnTo>
+                  <a:lnTo>
+                    <a:pt x="214867" y="210727"/>
+                  </a:lnTo>
+                  <a:lnTo>
+                    <a:pt x="286490" y="277462"/>
+                  </a:lnTo>
+                  <a:lnTo>
+                    <a:pt x="358112" y="342516"/>
+                  </a:lnTo>
+                  <a:lnTo>
+                    <a:pt x="429735" y="405932"/>
+                  </a:lnTo>
+                  <a:lnTo>
+                    <a:pt x="501357" y="467751"/>
+                  </a:lnTo>
+                  <a:lnTo>
+                    <a:pt x="572980" y="528013"/>
+                  </a:lnTo>
+                  <a:lnTo>
+                    <a:pt x="644602" y="586757"/>
+                  </a:lnTo>
+                  <a:lnTo>
+                    <a:pt x="716225" y="644022"/>
+                  </a:lnTo>
+                  <a:lnTo>
+                    <a:pt x="787847" y="699845"/>
+                  </a:lnTo>
+                  <a:lnTo>
+                    <a:pt x="859470" y="754262"/>
+                  </a:lnTo>
+                  <a:lnTo>
+                    <a:pt x="931092" y="807309"/>
+                  </a:lnTo>
+                  <a:lnTo>
+                    <a:pt x="1002715" y="859020"/>
+                  </a:lnTo>
+                  <a:lnTo>
+                    <a:pt x="1074337" y="909428"/>
+                  </a:lnTo>
+                  <a:lnTo>
+                    <a:pt x="1145960" y="958567"/>
+                  </a:lnTo>
+                  <a:lnTo>
+                    <a:pt x="1217582" y="1006469"/>
+                  </a:lnTo>
+                  <a:lnTo>
+                    <a:pt x="1289205" y="1053164"/>
+                  </a:lnTo>
+                  <a:lnTo>
+                    <a:pt x="1360827" y="1098683"/>
+                  </a:lnTo>
+                  <a:lnTo>
+                    <a:pt x="1432450" y="1143056"/>
+                  </a:lnTo>
+                  <a:lnTo>
+                    <a:pt x="1504073" y="1186312"/>
+                  </a:lnTo>
+                  <a:lnTo>
+                    <a:pt x="1575695" y="1228478"/>
+                  </a:lnTo>
+                  <a:lnTo>
+                    <a:pt x="1647318" y="1269582"/>
+                  </a:lnTo>
+                  <a:lnTo>
+                    <a:pt x="1718940" y="1309651"/>
+                  </a:lnTo>
+                  <a:lnTo>
+                    <a:pt x="1790563" y="1348711"/>
+                  </a:lnTo>
+                  <a:lnTo>
+                    <a:pt x="1862185" y="1386787"/>
+                  </a:lnTo>
+                  <a:lnTo>
+                    <a:pt x="1933808" y="1423905"/>
+                  </a:lnTo>
+                  <a:lnTo>
+                    <a:pt x="2005430" y="1460088"/>
+                  </a:lnTo>
+                  <a:lnTo>
+                    <a:pt x="2077053" y="1495359"/>
+                  </a:lnTo>
+                  <a:lnTo>
+                    <a:pt x="2148675" y="1529742"/>
+                  </a:lnTo>
+                  <a:lnTo>
+                    <a:pt x="2220298" y="1563260"/>
+                  </a:lnTo>
+                  <a:lnTo>
+                    <a:pt x="2291920" y="1595933"/>
+                  </a:lnTo>
+                  <a:lnTo>
+                    <a:pt x="2363543" y="1627783"/>
+                  </a:lnTo>
+                  <a:lnTo>
+                    <a:pt x="2435165" y="1658832"/>
+                  </a:lnTo>
+                  <a:lnTo>
+                    <a:pt x="2506788" y="1689098"/>
+                  </a:lnTo>
+                  <a:lnTo>
+                    <a:pt x="2578410" y="1718602"/>
+                  </a:lnTo>
+                  <a:lnTo>
+                    <a:pt x="2650033" y="1747364"/>
+                  </a:lnTo>
+                  <a:lnTo>
+                    <a:pt x="2721655" y="1775400"/>
+                  </a:lnTo>
+                  <a:lnTo>
+                    <a:pt x="2793278" y="1802731"/>
+                  </a:lnTo>
+                  <a:lnTo>
+                    <a:pt x="2864901" y="1829374"/>
+                  </a:lnTo>
+                  <a:lnTo>
+                    <a:pt x="2936523" y="1855345"/>
+                  </a:lnTo>
+                  <a:lnTo>
+                    <a:pt x="3008146" y="1880663"/>
+                  </a:lnTo>
+                  <a:lnTo>
+                    <a:pt x="3079768" y="1905343"/>
+                  </a:lnTo>
+                  <a:lnTo>
+                    <a:pt x="3151391" y="1929401"/>
+                  </a:lnTo>
+                  <a:lnTo>
+                    <a:pt x="3223013" y="1952854"/>
+                  </a:lnTo>
+                  <a:lnTo>
+                    <a:pt x="3294636" y="1975716"/>
+                  </a:lnTo>
+                  <a:lnTo>
+                    <a:pt x="3366258" y="1998002"/>
+                  </a:lnTo>
+                  <a:lnTo>
+                    <a:pt x="3437881" y="2019727"/>
+                  </a:lnTo>
+                  <a:lnTo>
+                    <a:pt x="3509503" y="2030980"/>
+                  </a:lnTo>
+                  <a:lnTo>
+                    <a:pt x="3581126" y="2030494"/>
+                  </a:lnTo>
+                  <a:lnTo>
+                    <a:pt x="3652748" y="2030007"/>
+                  </a:lnTo>
+                  <a:lnTo>
+                    <a:pt x="3724371" y="2029520"/>
+                  </a:lnTo>
+                  <a:lnTo>
+                    <a:pt x="3795993" y="2029033"/>
+                  </a:lnTo>
+                  <a:lnTo>
+                    <a:pt x="3867616" y="2028545"/>
+                  </a:lnTo>
+                  <a:lnTo>
+                    <a:pt x="3939238" y="2028057"/>
+                  </a:lnTo>
+                  <a:lnTo>
+                    <a:pt x="4010861" y="2027569"/>
+                  </a:lnTo>
+                  <a:lnTo>
+                    <a:pt x="4082483" y="2027081"/>
+                  </a:lnTo>
+                  <a:lnTo>
+                    <a:pt x="4154106" y="2026592"/>
+                  </a:lnTo>
+                  <a:lnTo>
+                    <a:pt x="4225729" y="2026103"/>
+                  </a:lnTo>
+                  <a:lnTo>
+                    <a:pt x="4297351" y="2025614"/>
+                  </a:lnTo>
+                  <a:lnTo>
+                    <a:pt x="4368974" y="2025124"/>
+                  </a:lnTo>
+                  <a:lnTo>
+                    <a:pt x="4440596" y="2024634"/>
+                  </a:lnTo>
+                  <a:lnTo>
+                    <a:pt x="4512219" y="2024144"/>
+                  </a:lnTo>
+                  <a:lnTo>
+                    <a:pt x="4583841" y="2023654"/>
+                  </a:lnTo>
+                  <a:lnTo>
+                    <a:pt x="4655464" y="2023163"/>
+                  </a:lnTo>
+                  <a:lnTo>
+                    <a:pt x="4727086" y="2022672"/>
+                  </a:lnTo>
+                  <a:lnTo>
+                    <a:pt x="4798709" y="2022180"/>
+                  </a:lnTo>
+                  <a:lnTo>
+                    <a:pt x="4870331" y="2021689"/>
+                  </a:lnTo>
+                  <a:lnTo>
+                    <a:pt x="4941954" y="2021197"/>
+                  </a:lnTo>
+                  <a:lnTo>
+                    <a:pt x="5013576" y="2020705"/>
+                  </a:lnTo>
+                  <a:lnTo>
+                    <a:pt x="5085199" y="2020212"/>
+                  </a:lnTo>
+                  <a:lnTo>
+                    <a:pt x="5156821" y="2019719"/>
+                  </a:lnTo>
+                  <a:lnTo>
+                    <a:pt x="5228444" y="2019226"/>
+                  </a:lnTo>
+                  <a:lnTo>
+                    <a:pt x="5300066" y="2018733"/>
+                  </a:lnTo>
+                  <a:lnTo>
+                    <a:pt x="5371689" y="2018239"/>
+                  </a:lnTo>
+                  <a:lnTo>
+                    <a:pt x="5443311" y="2017745"/>
+                  </a:lnTo>
+                  <a:lnTo>
+                    <a:pt x="5514934" y="2017251"/>
+                  </a:lnTo>
+                  <a:lnTo>
+                    <a:pt x="5586557" y="2016757"/>
+                  </a:lnTo>
+                  <a:lnTo>
+                    <a:pt x="5658179" y="2016262"/>
+                  </a:lnTo>
+                  <a:lnTo>
+                    <a:pt x="5729802" y="2015767"/>
+                  </a:lnTo>
+                  <a:lnTo>
+                    <a:pt x="5801424" y="2015271"/>
+                  </a:lnTo>
+                  <a:lnTo>
+                    <a:pt x="5873047" y="2014776"/>
+                  </a:lnTo>
+                  <a:lnTo>
+                    <a:pt x="5944669" y="2014280"/>
+                  </a:lnTo>
+                  <a:lnTo>
+                    <a:pt x="6016292" y="2013784"/>
+                  </a:lnTo>
+                  <a:lnTo>
+                    <a:pt x="6087914" y="2013287"/>
+                  </a:lnTo>
+                  <a:lnTo>
+                    <a:pt x="6159537" y="2012790"/>
+                  </a:lnTo>
+                  <a:lnTo>
+                    <a:pt x="6231159" y="2012293"/>
+                  </a:lnTo>
+                  <a:lnTo>
+                    <a:pt x="6302782" y="2011796"/>
+                  </a:lnTo>
+                  <a:lnTo>
+                    <a:pt x="6374404" y="2011298"/>
+                  </a:lnTo>
+                  <a:lnTo>
+                    <a:pt x="6446027" y="2010800"/>
+                  </a:lnTo>
+                  <a:lnTo>
+                    <a:pt x="6517649" y="2010302"/>
+                  </a:lnTo>
+                  <a:lnTo>
+                    <a:pt x="6589272" y="2009803"/>
+                  </a:lnTo>
+                  <a:lnTo>
+                    <a:pt x="6660894" y="2009304"/>
+                  </a:lnTo>
+                  <a:lnTo>
+                    <a:pt x="6732517" y="2008805"/>
+                  </a:lnTo>
+                  <a:lnTo>
+                    <a:pt x="6804139" y="2008306"/>
+                  </a:lnTo>
+                  <a:lnTo>
+                    <a:pt x="6875762" y="2007806"/>
+                  </a:lnTo>
+                  <a:lnTo>
+                    <a:pt x="6947385" y="2007306"/>
+                  </a:lnTo>
+                  <a:lnTo>
+                    <a:pt x="7019007" y="2006806"/>
+                  </a:lnTo>
+                  <a:lnTo>
+                    <a:pt x="7090630" y="2006305"/>
+                  </a:lnTo>
+                  <a:lnTo>
+                    <a:pt x="7090630" y="2631670"/>
+                  </a:lnTo>
+                  <a:lnTo>
+                    <a:pt x="7019007" y="2625754"/>
+                  </a:lnTo>
+                  <a:lnTo>
+                    <a:pt x="6947385" y="2619685"/>
+                  </a:lnTo>
+                  <a:lnTo>
+                    <a:pt x="6875762" y="2613459"/>
+                  </a:lnTo>
+                  <a:lnTo>
+                    <a:pt x="6804139" y="2607073"/>
+                  </a:lnTo>
+                  <a:lnTo>
+                    <a:pt x="6732517" y="2600522"/>
+                  </a:lnTo>
+                  <a:lnTo>
+                    <a:pt x="6660894" y="2593801"/>
+                  </a:lnTo>
+                  <a:lnTo>
+                    <a:pt x="6589272" y="2586907"/>
+                  </a:lnTo>
+                  <a:lnTo>
+                    <a:pt x="6517649" y="2579834"/>
+                  </a:lnTo>
+                  <a:lnTo>
+                    <a:pt x="6446027" y="2572579"/>
+                  </a:lnTo>
+                  <a:lnTo>
+                    <a:pt x="6374404" y="2565137"/>
+                  </a:lnTo>
+                  <a:lnTo>
+                    <a:pt x="6302782" y="2557502"/>
+                  </a:lnTo>
+                  <a:lnTo>
+                    <a:pt x="6231159" y="2549670"/>
+                  </a:lnTo>
+                  <a:lnTo>
+                    <a:pt x="6159537" y="2541636"/>
+                  </a:lnTo>
+                  <a:lnTo>
+                    <a:pt x="6087914" y="2533394"/>
+                  </a:lnTo>
+                  <a:lnTo>
+                    <a:pt x="6016292" y="2524939"/>
+                  </a:lnTo>
+                  <a:lnTo>
+                    <a:pt x="5944669" y="2516266"/>
+                  </a:lnTo>
+                  <a:lnTo>
+                    <a:pt x="5873047" y="2507368"/>
+                  </a:lnTo>
+                  <a:lnTo>
+                    <a:pt x="5801424" y="2498241"/>
+                  </a:lnTo>
+                  <a:lnTo>
+                    <a:pt x="5729802" y="2488878"/>
+                  </a:lnTo>
+                  <a:lnTo>
+                    <a:pt x="5658179" y="2479273"/>
+                  </a:lnTo>
+                  <a:lnTo>
+                    <a:pt x="5586557" y="2469420"/>
+                  </a:lnTo>
+                  <a:lnTo>
+                    <a:pt x="5514934" y="2459313"/>
+                  </a:lnTo>
+                  <a:lnTo>
+                    <a:pt x="5443311" y="2448944"/>
+                  </a:lnTo>
+                  <a:lnTo>
+                    <a:pt x="5371689" y="2438308"/>
+                  </a:lnTo>
+                  <a:lnTo>
+                    <a:pt x="5300066" y="2427396"/>
+                  </a:lnTo>
+                  <a:lnTo>
+                    <a:pt x="5228444" y="2416203"/>
+                  </a:lnTo>
+                  <a:lnTo>
+                    <a:pt x="5156821" y="2404721"/>
+                  </a:lnTo>
+                  <a:lnTo>
+                    <a:pt x="5085199" y="2392942"/>
+                  </a:lnTo>
+                  <a:lnTo>
+                    <a:pt x="5013576" y="2380859"/>
+                  </a:lnTo>
+                  <a:lnTo>
+                    <a:pt x="4941954" y="2368463"/>
+                  </a:lnTo>
+                  <a:lnTo>
+                    <a:pt x="4870331" y="2355747"/>
+                  </a:lnTo>
+                  <a:lnTo>
+                    <a:pt x="4798709" y="2342703"/>
+                  </a:lnTo>
+                  <a:lnTo>
+                    <a:pt x="4727086" y="2329322"/>
+                  </a:lnTo>
+                  <a:lnTo>
+                    <a:pt x="4655464" y="2315595"/>
+                  </a:lnTo>
+                  <a:lnTo>
+                    <a:pt x="4583841" y="2301514"/>
+                  </a:lnTo>
+                  <a:lnTo>
+                    <a:pt x="4512219" y="2287069"/>
+                  </a:lnTo>
+                  <a:lnTo>
+                    <a:pt x="4440596" y="2272250"/>
+                  </a:lnTo>
+                  <a:lnTo>
+                    <a:pt x="4368974" y="2257049"/>
+                  </a:lnTo>
+                  <a:lnTo>
+                    <a:pt x="4297351" y="2241455"/>
+                  </a:lnTo>
+                  <a:lnTo>
+                    <a:pt x="4225729" y="2225458"/>
+                  </a:lnTo>
+                  <a:lnTo>
+                    <a:pt x="4154106" y="2209048"/>
+                  </a:lnTo>
+                  <a:lnTo>
+                    <a:pt x="4082483" y="2192214"/>
+                  </a:lnTo>
+                  <a:lnTo>
+                    <a:pt x="4010861" y="2174945"/>
+                  </a:lnTo>
+                  <a:lnTo>
+                    <a:pt x="3939238" y="2157230"/>
+                  </a:lnTo>
+                  <a:lnTo>
+                    <a:pt x="3867616" y="2139058"/>
+                  </a:lnTo>
+                  <a:lnTo>
+                    <a:pt x="3795993" y="2120415"/>
+                  </a:lnTo>
+                  <a:lnTo>
+                    <a:pt x="3724371" y="2101292"/>
+                  </a:lnTo>
+                  <a:lnTo>
+                    <a:pt x="3652748" y="2081674"/>
+                  </a:lnTo>
+                  <a:lnTo>
+                    <a:pt x="3581126" y="2061549"/>
+                  </a:lnTo>
+                  <a:lnTo>
+                    <a:pt x="3509503" y="2040905"/>
+                  </a:lnTo>
+                  <a:lnTo>
+                    <a:pt x="3437881" y="2031467"/>
+                  </a:lnTo>
+                  <a:lnTo>
+                    <a:pt x="3366258" y="2031952"/>
+                  </a:lnTo>
+                  <a:lnTo>
+                    <a:pt x="3294636" y="2032438"/>
+                  </a:lnTo>
+                  <a:lnTo>
+                    <a:pt x="3223013" y="2032923"/>
+                  </a:lnTo>
+                  <a:lnTo>
+                    <a:pt x="3151391" y="2033408"/>
+                  </a:lnTo>
+                  <a:lnTo>
+                    <a:pt x="3079768" y="2033893"/>
+                  </a:lnTo>
+                  <a:lnTo>
+                    <a:pt x="3008146" y="2034378"/>
+                  </a:lnTo>
+                  <a:lnTo>
+                    <a:pt x="2936523" y="2034862"/>
+                  </a:lnTo>
+                  <a:lnTo>
+                    <a:pt x="2864901" y="2035346"/>
+                  </a:lnTo>
+                  <a:lnTo>
+                    <a:pt x="2793278" y="2035829"/>
+                  </a:lnTo>
+                  <a:lnTo>
+                    <a:pt x="2721655" y="2036313"/>
+                  </a:lnTo>
+                  <a:lnTo>
+                    <a:pt x="2650033" y="2036796"/>
+                  </a:lnTo>
+                  <a:lnTo>
+                    <a:pt x="2578410" y="2037278"/>
+                  </a:lnTo>
+                  <a:lnTo>
+                    <a:pt x="2506788" y="2037761"/>
+                  </a:lnTo>
+                  <a:lnTo>
+                    <a:pt x="2435165" y="2038243"/>
+                  </a:lnTo>
+                  <a:lnTo>
+                    <a:pt x="2363543" y="2038725"/>
+                  </a:lnTo>
+                  <a:lnTo>
+                    <a:pt x="2291920" y="2039207"/>
+                  </a:lnTo>
+                  <a:lnTo>
+                    <a:pt x="2220298" y="2039688"/>
+                  </a:lnTo>
+                  <a:lnTo>
+                    <a:pt x="2148675" y="2040169"/>
+                  </a:lnTo>
+                  <a:lnTo>
+                    <a:pt x="2077053" y="2040650"/>
+                  </a:lnTo>
+                  <a:lnTo>
+                    <a:pt x="2005430" y="2041130"/>
+                  </a:lnTo>
+                  <a:lnTo>
+                    <a:pt x="1933808" y="2041611"/>
+                  </a:lnTo>
+                  <a:lnTo>
+                    <a:pt x="1862185" y="2042091"/>
+                  </a:lnTo>
+                  <a:lnTo>
+                    <a:pt x="1790563" y="2042570"/>
+                  </a:lnTo>
+                  <a:lnTo>
+                    <a:pt x="1718940" y="2043050"/>
+                  </a:lnTo>
+                  <a:lnTo>
+                    <a:pt x="1647318" y="2043529"/>
+                  </a:lnTo>
+                  <a:lnTo>
+                    <a:pt x="1575695" y="2044007"/>
+                  </a:lnTo>
+                  <a:lnTo>
+                    <a:pt x="1504073" y="2044486"/>
+                  </a:lnTo>
+                  <a:lnTo>
+                    <a:pt x="1432450" y="2044964"/>
+                  </a:lnTo>
+                  <a:lnTo>
+                    <a:pt x="1360827" y="2045442"/>
+                  </a:lnTo>
+                  <a:lnTo>
+                    <a:pt x="1289205" y="2045920"/>
+                  </a:lnTo>
+                  <a:lnTo>
+                    <a:pt x="1217582" y="2046397"/>
+                  </a:lnTo>
+                  <a:lnTo>
+                    <a:pt x="1145960" y="2046875"/>
+                  </a:lnTo>
+                  <a:lnTo>
+                    <a:pt x="1074337" y="2047351"/>
+                  </a:lnTo>
+                  <a:lnTo>
+                    <a:pt x="1002715" y="2047828"/>
+                  </a:lnTo>
+                  <a:lnTo>
+                    <a:pt x="931092" y="2048304"/>
+                  </a:lnTo>
+                  <a:lnTo>
+                    <a:pt x="859470" y="2048780"/>
+                  </a:lnTo>
+                  <a:lnTo>
+                    <a:pt x="787847" y="2049256"/>
+                  </a:lnTo>
+                  <a:lnTo>
+                    <a:pt x="716225" y="2049731"/>
+                  </a:lnTo>
+                  <a:lnTo>
+                    <a:pt x="644602" y="2050207"/>
+                  </a:lnTo>
+                  <a:lnTo>
+                    <a:pt x="572980" y="2050682"/>
+                  </a:lnTo>
+                  <a:lnTo>
+                    <a:pt x="501357" y="2051156"/>
+                  </a:lnTo>
+                  <a:lnTo>
+                    <a:pt x="429735" y="2051631"/>
+                  </a:lnTo>
+                  <a:lnTo>
+                    <a:pt x="358112" y="2052105"/>
+                  </a:lnTo>
+                  <a:lnTo>
+                    <a:pt x="286490" y="2052578"/>
+                  </a:lnTo>
+                  <a:lnTo>
+                    <a:pt x="214867" y="2053052"/>
+                  </a:lnTo>
+                  <a:lnTo>
+                    <a:pt x="143245" y="2053525"/>
+                  </a:lnTo>
+                  <a:lnTo>
+                    <a:pt x="71622" y="2053998"/>
+                  </a:lnTo>
+                  <a:lnTo>
+                    <a:pt x="0" y="2054471"/>
                   </a:lnTo>
                   <a:close/>
                 </a:path>
@@ -4020,312 +4020,312 @@
           </p:nvSpPr>
           <p:spPr>
             <a:xfrm>
-              <a:off x="1172049" y="2711851"/>
-              <a:ext cx="7090630" cy="2015687"/>
+              <a:off x="1172049" y="2696581"/>
+              <a:ext cx="7090630" cy="2030980"/>
             </a:xfrm>
             <a:custGeom>
               <a:avLst/>
               <a:pathLst>
-                <a:path w="7090630" h="2015687">
+                <a:path w="7090630" h="2030980">
                   <a:moveTo>
                     <a:pt x="0" y="0"/>
                   </a:moveTo>
                   <a:lnTo>
-                    <a:pt x="71622" y="71671"/>
-                  </a:lnTo>
-                  <a:lnTo>
-                    <a:pt x="143245" y="141537"/>
-                  </a:lnTo>
-                  <a:lnTo>
-                    <a:pt x="214867" y="209643"/>
-                  </a:lnTo>
-                  <a:lnTo>
-                    <a:pt x="286490" y="276034"/>
-                  </a:lnTo>
-                  <a:lnTo>
-                    <a:pt x="358112" y="340753"/>
-                  </a:lnTo>
-                  <a:lnTo>
-                    <a:pt x="429735" y="403841"/>
-                  </a:lnTo>
-                  <a:lnTo>
-                    <a:pt x="501357" y="465340"/>
-                  </a:lnTo>
-                  <a:lnTo>
-                    <a:pt x="572980" y="525290"/>
-                  </a:lnTo>
-                  <a:lnTo>
-                    <a:pt x="644602" y="583730"/>
-                  </a:lnTo>
-                  <a:lnTo>
-                    <a:pt x="716225" y="640698"/>
-                  </a:lnTo>
-                  <a:lnTo>
-                    <a:pt x="787847" y="696231"/>
-                  </a:lnTo>
-                  <a:lnTo>
-                    <a:pt x="859470" y="750366"/>
-                  </a:lnTo>
-                  <a:lnTo>
-                    <a:pt x="931092" y="803137"/>
-                  </a:lnTo>
-                  <a:lnTo>
-                    <a:pt x="1002715" y="854578"/>
-                  </a:lnTo>
-                  <a:lnTo>
-                    <a:pt x="1074337" y="904724"/>
-                  </a:lnTo>
-                  <a:lnTo>
-                    <a:pt x="1145960" y="953607"/>
-                  </a:lnTo>
-                  <a:lnTo>
-                    <a:pt x="1217582" y="1001258"/>
-                  </a:lnTo>
-                  <a:lnTo>
-                    <a:pt x="1289205" y="1047709"/>
-                  </a:lnTo>
-                  <a:lnTo>
-                    <a:pt x="1360827" y="1092990"/>
-                  </a:lnTo>
-                  <a:lnTo>
-                    <a:pt x="1432450" y="1137131"/>
-                  </a:lnTo>
-                  <a:lnTo>
-                    <a:pt x="1504073" y="1180160"/>
-                  </a:lnTo>
-                  <a:lnTo>
-                    <a:pt x="1575695" y="1222105"/>
-                  </a:lnTo>
-                  <a:lnTo>
-                    <a:pt x="1647318" y="1262993"/>
-                  </a:lnTo>
-                  <a:lnTo>
-                    <a:pt x="1718940" y="1302851"/>
-                  </a:lnTo>
-                  <a:lnTo>
-                    <a:pt x="1790563" y="1341706"/>
-                  </a:lnTo>
-                  <a:lnTo>
-                    <a:pt x="1862185" y="1379582"/>
-                  </a:lnTo>
-                  <a:lnTo>
-                    <a:pt x="1933808" y="1416503"/>
-                  </a:lnTo>
-                  <a:lnTo>
-                    <a:pt x="2005430" y="1452495"/>
-                  </a:lnTo>
-                  <a:lnTo>
-                    <a:pt x="2077053" y="1487580"/>
-                  </a:lnTo>
-                  <a:lnTo>
-                    <a:pt x="2148675" y="1521782"/>
-                  </a:lnTo>
-                  <a:lnTo>
-                    <a:pt x="2220298" y="1555122"/>
-                  </a:lnTo>
-                  <a:lnTo>
-                    <a:pt x="2291920" y="1587622"/>
-                  </a:lnTo>
-                  <a:lnTo>
-                    <a:pt x="2363543" y="1619303"/>
-                  </a:lnTo>
-                  <a:lnTo>
-                    <a:pt x="2435165" y="1650187"/>
-                  </a:lnTo>
-                  <a:lnTo>
-                    <a:pt x="2506788" y="1680292"/>
-                  </a:lnTo>
-                  <a:lnTo>
-                    <a:pt x="2578410" y="1709640"/>
-                  </a:lnTo>
-                  <a:lnTo>
-                    <a:pt x="2650033" y="1738248"/>
-                  </a:lnTo>
-                  <a:lnTo>
-                    <a:pt x="2721655" y="1766135"/>
-                  </a:lnTo>
-                  <a:lnTo>
-                    <a:pt x="2793278" y="1793320"/>
-                  </a:lnTo>
-                  <a:lnTo>
-                    <a:pt x="2864901" y="1819821"/>
-                  </a:lnTo>
-                  <a:lnTo>
-                    <a:pt x="2936523" y="1845653"/>
-                  </a:lnTo>
-                  <a:lnTo>
-                    <a:pt x="3008146" y="1870835"/>
-                  </a:lnTo>
-                  <a:lnTo>
-                    <a:pt x="3079768" y="1895383"/>
-                  </a:lnTo>
-                  <a:lnTo>
-                    <a:pt x="3151391" y="1919313"/>
-                  </a:lnTo>
-                  <a:lnTo>
-                    <a:pt x="3223013" y="1942639"/>
-                  </a:lnTo>
-                  <a:lnTo>
-                    <a:pt x="3294636" y="1965379"/>
-                  </a:lnTo>
-                  <a:lnTo>
-                    <a:pt x="3366258" y="1987545"/>
-                  </a:lnTo>
-                  <a:lnTo>
-                    <a:pt x="3437881" y="2009153"/>
-                  </a:lnTo>
-                  <a:lnTo>
-                    <a:pt x="3509503" y="2015687"/>
-                  </a:lnTo>
-                  <a:lnTo>
-                    <a:pt x="3581126" y="2015325"/>
-                  </a:lnTo>
-                  <a:lnTo>
-                    <a:pt x="3652748" y="2014962"/>
-                  </a:lnTo>
-                  <a:lnTo>
-                    <a:pt x="3724371" y="2014599"/>
-                  </a:lnTo>
-                  <a:lnTo>
-                    <a:pt x="3795993" y="2014236"/>
-                  </a:lnTo>
-                  <a:lnTo>
-                    <a:pt x="3867616" y="2013872"/>
-                  </a:lnTo>
-                  <a:lnTo>
-                    <a:pt x="3939238" y="2013509"/>
-                  </a:lnTo>
-                  <a:lnTo>
-                    <a:pt x="4010861" y="2013145"/>
-                  </a:lnTo>
-                  <a:lnTo>
-                    <a:pt x="4082483" y="2012781"/>
-                  </a:lnTo>
-                  <a:lnTo>
-                    <a:pt x="4154106" y="2012418"/>
-                  </a:lnTo>
-                  <a:lnTo>
-                    <a:pt x="4225729" y="2012053"/>
-                  </a:lnTo>
-                  <a:lnTo>
-                    <a:pt x="4297351" y="2011689"/>
-                  </a:lnTo>
-                  <a:lnTo>
-                    <a:pt x="4368974" y="2011325"/>
-                  </a:lnTo>
-                  <a:lnTo>
-                    <a:pt x="4440596" y="2010960"/>
-                  </a:lnTo>
-                  <a:lnTo>
-                    <a:pt x="4512219" y="2010595"/>
-                  </a:lnTo>
-                  <a:lnTo>
-                    <a:pt x="4583841" y="2010231"/>
-                  </a:lnTo>
-                  <a:lnTo>
-                    <a:pt x="4655464" y="2009866"/>
-                  </a:lnTo>
-                  <a:lnTo>
-                    <a:pt x="4727086" y="2009500"/>
-                  </a:lnTo>
-                  <a:lnTo>
-                    <a:pt x="4798709" y="2009135"/>
-                  </a:lnTo>
-                  <a:lnTo>
-                    <a:pt x="4870331" y="2008769"/>
-                  </a:lnTo>
-                  <a:lnTo>
-                    <a:pt x="4941954" y="2008404"/>
-                  </a:lnTo>
-                  <a:lnTo>
-                    <a:pt x="5013576" y="2008038"/>
-                  </a:lnTo>
-                  <a:lnTo>
-                    <a:pt x="5085199" y="2007672"/>
-                  </a:lnTo>
-                  <a:lnTo>
-                    <a:pt x="5156821" y="2007306"/>
-                  </a:lnTo>
-                  <a:lnTo>
-                    <a:pt x="5228444" y="2006939"/>
-                  </a:lnTo>
-                  <a:lnTo>
-                    <a:pt x="5300066" y="2006573"/>
-                  </a:lnTo>
-                  <a:lnTo>
-                    <a:pt x="5371689" y="2006206"/>
-                  </a:lnTo>
-                  <a:lnTo>
-                    <a:pt x="5443311" y="2005839"/>
-                  </a:lnTo>
-                  <a:lnTo>
-                    <a:pt x="5514934" y="2005472"/>
-                  </a:lnTo>
-                  <a:lnTo>
-                    <a:pt x="5586557" y="2005105"/>
-                  </a:lnTo>
-                  <a:lnTo>
-                    <a:pt x="5658179" y="2004738"/>
-                  </a:lnTo>
-                  <a:lnTo>
-                    <a:pt x="5729802" y="2004371"/>
-                  </a:lnTo>
-                  <a:lnTo>
-                    <a:pt x="5801424" y="2004003"/>
-                  </a:lnTo>
-                  <a:lnTo>
-                    <a:pt x="5873047" y="2003635"/>
-                  </a:lnTo>
-                  <a:lnTo>
-                    <a:pt x="5944669" y="2003267"/>
-                  </a:lnTo>
-                  <a:lnTo>
-                    <a:pt x="6016292" y="2002899"/>
-                  </a:lnTo>
-                  <a:lnTo>
-                    <a:pt x="6087914" y="2002531"/>
-                  </a:lnTo>
-                  <a:lnTo>
-                    <a:pt x="6159537" y="2002163"/>
-                  </a:lnTo>
-                  <a:lnTo>
-                    <a:pt x="6231159" y="2001794"/>
-                  </a:lnTo>
-                  <a:lnTo>
-                    <a:pt x="6302782" y="2001425"/>
-                  </a:lnTo>
-                  <a:lnTo>
-                    <a:pt x="6374404" y="2001056"/>
-                  </a:lnTo>
-                  <a:lnTo>
-                    <a:pt x="6446027" y="2000687"/>
-                  </a:lnTo>
-                  <a:lnTo>
-                    <a:pt x="6517649" y="2000318"/>
-                  </a:lnTo>
-                  <a:lnTo>
-                    <a:pt x="6589272" y="1999949"/>
-                  </a:lnTo>
-                  <a:lnTo>
-                    <a:pt x="6660894" y="1999579"/>
-                  </a:lnTo>
-                  <a:lnTo>
-                    <a:pt x="6732517" y="1999209"/>
-                  </a:lnTo>
-                  <a:lnTo>
-                    <a:pt x="6804139" y="1998840"/>
-                  </a:lnTo>
-                  <a:lnTo>
-                    <a:pt x="6875762" y="1998470"/>
-                  </a:lnTo>
-                  <a:lnTo>
-                    <a:pt x="6947385" y="1998099"/>
-                  </a:lnTo>
-                  <a:lnTo>
-                    <a:pt x="7019007" y="1997729"/>
-                  </a:lnTo>
-                  <a:lnTo>
-                    <a:pt x="7090630" y="1997358"/>
+                    <a:pt x="71622" y="72041"/>
+                  </a:lnTo>
+                  <a:lnTo>
+                    <a:pt x="143245" y="142268"/>
+                  </a:lnTo>
+                  <a:lnTo>
+                    <a:pt x="214867" y="210727"/>
+                  </a:lnTo>
+                  <a:lnTo>
+                    <a:pt x="286490" y="277462"/>
+                  </a:lnTo>
+                  <a:lnTo>
+                    <a:pt x="358112" y="342516"/>
+                  </a:lnTo>
+                  <a:lnTo>
+                    <a:pt x="429735" y="405932"/>
+                  </a:lnTo>
+                  <a:lnTo>
+                    <a:pt x="501357" y="467751"/>
+                  </a:lnTo>
+                  <a:lnTo>
+                    <a:pt x="572980" y="528013"/>
+                  </a:lnTo>
+                  <a:lnTo>
+                    <a:pt x="644602" y="586757"/>
+                  </a:lnTo>
+                  <a:lnTo>
+                    <a:pt x="716225" y="644022"/>
+                  </a:lnTo>
+                  <a:lnTo>
+                    <a:pt x="787847" y="699845"/>
+                  </a:lnTo>
+                  <a:lnTo>
+                    <a:pt x="859470" y="754262"/>
+                  </a:lnTo>
+                  <a:lnTo>
+                    <a:pt x="931092" y="807309"/>
+                  </a:lnTo>
+                  <a:lnTo>
+                    <a:pt x="1002715" y="859020"/>
+                  </a:lnTo>
+                  <a:lnTo>
+                    <a:pt x="1074337" y="909428"/>
+                  </a:lnTo>
+                  <a:lnTo>
+                    <a:pt x="1145960" y="958567"/>
+                  </a:lnTo>
+                  <a:lnTo>
+                    <a:pt x="1217582" y="1006469"/>
+                  </a:lnTo>
+                  <a:lnTo>
+                    <a:pt x="1289205" y="1053164"/>
+                  </a:lnTo>
+                  <a:lnTo>
+                    <a:pt x="1360827" y="1098683"/>
+                  </a:lnTo>
+                  <a:lnTo>
+                    <a:pt x="1432450" y="1143056"/>
+                  </a:lnTo>
+                  <a:lnTo>
+                    <a:pt x="1504073" y="1186312"/>
+                  </a:lnTo>
+                  <a:lnTo>
+                    <a:pt x="1575695" y="1228478"/>
+                  </a:lnTo>
+                  <a:lnTo>
+                    <a:pt x="1647318" y="1269582"/>
+                  </a:lnTo>
+                  <a:lnTo>
+                    <a:pt x="1718940" y="1309651"/>
+                  </a:lnTo>
+                  <a:lnTo>
+                    <a:pt x="1790563" y="1348711"/>
+                  </a:lnTo>
+                  <a:lnTo>
+                    <a:pt x="1862185" y="1386787"/>
+                  </a:lnTo>
+                  <a:lnTo>
+                    <a:pt x="1933808" y="1423905"/>
+                  </a:lnTo>
+                  <a:lnTo>
+                    <a:pt x="2005430" y="1460088"/>
+                  </a:lnTo>
+                  <a:lnTo>
+                    <a:pt x="2077053" y="1495359"/>
+                  </a:lnTo>
+                  <a:lnTo>
+                    <a:pt x="2148675" y="1529742"/>
+                  </a:lnTo>
+                  <a:lnTo>
+                    <a:pt x="2220298" y="1563260"/>
+                  </a:lnTo>
+                  <a:lnTo>
+                    <a:pt x="2291920" y="1595933"/>
+                  </a:lnTo>
+                  <a:lnTo>
+                    <a:pt x="2363543" y="1627783"/>
+                  </a:lnTo>
+                  <a:lnTo>
+                    <a:pt x="2435165" y="1658832"/>
+                  </a:lnTo>
+                  <a:lnTo>
+                    <a:pt x="2506788" y="1689098"/>
+                  </a:lnTo>
+                  <a:lnTo>
+                    <a:pt x="2578410" y="1718602"/>
+                  </a:lnTo>
+                  <a:lnTo>
+                    <a:pt x="2650033" y="1747364"/>
+                  </a:lnTo>
+                  <a:lnTo>
+                    <a:pt x="2721655" y="1775400"/>
+                  </a:lnTo>
+                  <a:lnTo>
+                    <a:pt x="2793278" y="1802731"/>
+                  </a:lnTo>
+                  <a:lnTo>
+                    <a:pt x="2864901" y="1829374"/>
+                  </a:lnTo>
+                  <a:lnTo>
+                    <a:pt x="2936523" y="1855345"/>
+                  </a:lnTo>
+                  <a:lnTo>
+                    <a:pt x="3008146" y="1880663"/>
+                  </a:lnTo>
+                  <a:lnTo>
+                    <a:pt x="3079768" y="1905343"/>
+                  </a:lnTo>
+                  <a:lnTo>
+                    <a:pt x="3151391" y="1929401"/>
+                  </a:lnTo>
+                  <a:lnTo>
+                    <a:pt x="3223013" y="1952854"/>
+                  </a:lnTo>
+                  <a:lnTo>
+                    <a:pt x="3294636" y="1975716"/>
+                  </a:lnTo>
+                  <a:lnTo>
+                    <a:pt x="3366258" y="1998002"/>
+                  </a:lnTo>
+                  <a:lnTo>
+                    <a:pt x="3437881" y="2019727"/>
+                  </a:lnTo>
+                  <a:lnTo>
+                    <a:pt x="3509503" y="2030980"/>
+                  </a:lnTo>
+                  <a:lnTo>
+                    <a:pt x="3581126" y="2030494"/>
+                  </a:lnTo>
+                  <a:lnTo>
+                    <a:pt x="3652748" y="2030007"/>
+                  </a:lnTo>
+                  <a:lnTo>
+                    <a:pt x="3724371" y="2029520"/>
+                  </a:lnTo>
+                  <a:lnTo>
+                    <a:pt x="3795993" y="2029033"/>
+                  </a:lnTo>
+                  <a:lnTo>
+                    <a:pt x="3867616" y="2028545"/>
+                  </a:lnTo>
+                  <a:lnTo>
+                    <a:pt x="3939238" y="2028057"/>
+                  </a:lnTo>
+                  <a:lnTo>
+                    <a:pt x="4010861" y="2027569"/>
+                  </a:lnTo>
+                  <a:lnTo>
+                    <a:pt x="4082483" y="2027081"/>
+                  </a:lnTo>
+                  <a:lnTo>
+                    <a:pt x="4154106" y="2026592"/>
+                  </a:lnTo>
+                  <a:lnTo>
+                    <a:pt x="4225729" y="2026103"/>
+                  </a:lnTo>
+                  <a:lnTo>
+                    <a:pt x="4297351" y="2025614"/>
+                  </a:lnTo>
+                  <a:lnTo>
+                    <a:pt x="4368974" y="2025124"/>
+                  </a:lnTo>
+                  <a:lnTo>
+                    <a:pt x="4440596" y="2024634"/>
+                  </a:lnTo>
+                  <a:lnTo>
+                    <a:pt x="4512219" y="2024144"/>
+                  </a:lnTo>
+                  <a:lnTo>
+                    <a:pt x="4583841" y="2023654"/>
+                  </a:lnTo>
+                  <a:lnTo>
+                    <a:pt x="4655464" y="2023163"/>
+                  </a:lnTo>
+                  <a:lnTo>
+                    <a:pt x="4727086" y="2022672"/>
+                  </a:lnTo>
+                  <a:lnTo>
+                    <a:pt x="4798709" y="2022180"/>
+                  </a:lnTo>
+                  <a:lnTo>
+                    <a:pt x="4870331" y="2021689"/>
+                  </a:lnTo>
+                  <a:lnTo>
+                    <a:pt x="4941954" y="2021197"/>
+                  </a:lnTo>
+                  <a:lnTo>
+                    <a:pt x="5013576" y="2020705"/>
+                  </a:lnTo>
+                  <a:lnTo>
+                    <a:pt x="5085199" y="2020212"/>
+                  </a:lnTo>
+                  <a:lnTo>
+                    <a:pt x="5156821" y="2019719"/>
+                  </a:lnTo>
+                  <a:lnTo>
+                    <a:pt x="5228444" y="2019226"/>
+                  </a:lnTo>
+                  <a:lnTo>
+                    <a:pt x="5300066" y="2018733"/>
+                  </a:lnTo>
+                  <a:lnTo>
+                    <a:pt x="5371689" y="2018239"/>
+                  </a:lnTo>
+                  <a:lnTo>
+                    <a:pt x="5443311" y="2017745"/>
+                  </a:lnTo>
+                  <a:lnTo>
+                    <a:pt x="5514934" y="2017251"/>
+                  </a:lnTo>
+                  <a:lnTo>
+                    <a:pt x="5586557" y="2016757"/>
+                  </a:lnTo>
+                  <a:lnTo>
+                    <a:pt x="5658179" y="2016262"/>
+                  </a:lnTo>
+                  <a:lnTo>
+                    <a:pt x="5729802" y="2015767"/>
+                  </a:lnTo>
+                  <a:lnTo>
+                    <a:pt x="5801424" y="2015271"/>
+                  </a:lnTo>
+                  <a:lnTo>
+                    <a:pt x="5873047" y="2014776"/>
+                  </a:lnTo>
+                  <a:lnTo>
+                    <a:pt x="5944669" y="2014280"/>
+                  </a:lnTo>
+                  <a:lnTo>
+                    <a:pt x="6016292" y="2013784"/>
+                  </a:lnTo>
+                  <a:lnTo>
+                    <a:pt x="6087914" y="2013287"/>
+                  </a:lnTo>
+                  <a:lnTo>
+                    <a:pt x="6159537" y="2012790"/>
+                  </a:lnTo>
+                  <a:lnTo>
+                    <a:pt x="6231159" y="2012293"/>
+                  </a:lnTo>
+                  <a:lnTo>
+                    <a:pt x="6302782" y="2011796"/>
+                  </a:lnTo>
+                  <a:lnTo>
+                    <a:pt x="6374404" y="2011298"/>
+                  </a:lnTo>
+                  <a:lnTo>
+                    <a:pt x="6446027" y="2010800"/>
+                  </a:lnTo>
+                  <a:lnTo>
+                    <a:pt x="6517649" y="2010302"/>
+                  </a:lnTo>
+                  <a:lnTo>
+                    <a:pt x="6589272" y="2009803"/>
+                  </a:lnTo>
+                  <a:lnTo>
+                    <a:pt x="6660894" y="2009304"/>
+                  </a:lnTo>
+                  <a:lnTo>
+                    <a:pt x="6732517" y="2008805"/>
+                  </a:lnTo>
+                  <a:lnTo>
+                    <a:pt x="6804139" y="2008306"/>
+                  </a:lnTo>
+                  <a:lnTo>
+                    <a:pt x="6875762" y="2007806"/>
+                  </a:lnTo>
+                  <a:lnTo>
+                    <a:pt x="6947385" y="2007306"/>
+                  </a:lnTo>
+                  <a:lnTo>
+                    <a:pt x="7019007" y="2006806"/>
+                  </a:lnTo>
+                  <a:lnTo>
+                    <a:pt x="7090630" y="2006305"/>
                   </a:lnTo>
                 </a:path>
               </a:pathLst>
@@ -4345,312 +4345,312 @@
           </p:nvSpPr>
           <p:spPr>
             <a:xfrm>
-              <a:off x="1172049" y="4727902"/>
-              <a:ext cx="7090630" cy="601688"/>
+              <a:off x="1172049" y="4728048"/>
+              <a:ext cx="7090630" cy="600203"/>
             </a:xfrm>
             <a:custGeom>
               <a:avLst/>
               <a:pathLst>
-                <a:path w="7090630" h="601688">
+                <a:path w="7090630" h="600203">
                   <a:moveTo>
-                    <a:pt x="7090630" y="601688"/>
+                    <a:pt x="7090630" y="600203"/>
                   </a:moveTo>
                   <a:lnTo>
-                    <a:pt x="7019007" y="595805"/>
-                  </a:lnTo>
-                  <a:lnTo>
-                    <a:pt x="6947385" y="589771"/>
-                  </a:lnTo>
-                  <a:lnTo>
-                    <a:pt x="6875762" y="583580"/>
-                  </a:lnTo>
-                  <a:lnTo>
-                    <a:pt x="6804139" y="577230"/>
-                  </a:lnTo>
-                  <a:lnTo>
-                    <a:pt x="6732517" y="570715"/>
-                  </a:lnTo>
-                  <a:lnTo>
-                    <a:pt x="6660894" y="564032"/>
-                  </a:lnTo>
-                  <a:lnTo>
-                    <a:pt x="6589272" y="557177"/>
-                  </a:lnTo>
-                  <a:lnTo>
-                    <a:pt x="6517649" y="550144"/>
-                  </a:lnTo>
-                  <a:lnTo>
-                    <a:pt x="6446027" y="542930"/>
-                  </a:lnTo>
-                  <a:lnTo>
-                    <a:pt x="6374404" y="535529"/>
-                  </a:lnTo>
-                  <a:lnTo>
-                    <a:pt x="6302782" y="527937"/>
-                  </a:lnTo>
-                  <a:lnTo>
-                    <a:pt x="6231159" y="520148"/>
-                  </a:lnTo>
-                  <a:lnTo>
-                    <a:pt x="6159537" y="512159"/>
-                  </a:lnTo>
-                  <a:lnTo>
-                    <a:pt x="6087914" y="503963"/>
-                  </a:lnTo>
-                  <a:lnTo>
-                    <a:pt x="6016292" y="495555"/>
-                  </a:lnTo>
-                  <a:lnTo>
-                    <a:pt x="5944669" y="486930"/>
-                  </a:lnTo>
-                  <a:lnTo>
-                    <a:pt x="5873047" y="478082"/>
-                  </a:lnTo>
-                  <a:lnTo>
-                    <a:pt x="5801424" y="469006"/>
-                  </a:lnTo>
-                  <a:lnTo>
-                    <a:pt x="5729802" y="459695"/>
-                  </a:lnTo>
-                  <a:lnTo>
-                    <a:pt x="5658179" y="450143"/>
-                  </a:lnTo>
-                  <a:lnTo>
-                    <a:pt x="5586557" y="440345"/>
-                  </a:lnTo>
-                  <a:lnTo>
-                    <a:pt x="5514934" y="430293"/>
-                  </a:lnTo>
-                  <a:lnTo>
-                    <a:pt x="5443311" y="419982"/>
-                  </a:lnTo>
-                  <a:lnTo>
-                    <a:pt x="5371689" y="409404"/>
-                  </a:lnTo>
-                  <a:lnTo>
-                    <a:pt x="5300066" y="398553"/>
-                  </a:lnTo>
-                  <a:lnTo>
-                    <a:pt x="5228444" y="387422"/>
-                  </a:lnTo>
-                  <a:lnTo>
-                    <a:pt x="5156821" y="376003"/>
-                  </a:lnTo>
-                  <a:lnTo>
-                    <a:pt x="5085199" y="364289"/>
-                  </a:lnTo>
-                  <a:lnTo>
-                    <a:pt x="5013576" y="352272"/>
-                  </a:lnTo>
-                  <a:lnTo>
-                    <a:pt x="4941954" y="339944"/>
-                  </a:lnTo>
-                  <a:lnTo>
-                    <a:pt x="4870331" y="327299"/>
-                  </a:lnTo>
-                  <a:lnTo>
-                    <a:pt x="4798709" y="314326"/>
-                  </a:lnTo>
-                  <a:lnTo>
-                    <a:pt x="4727086" y="301018"/>
-                  </a:lnTo>
-                  <a:lnTo>
-                    <a:pt x="4655464" y="287366"/>
-                  </a:lnTo>
-                  <a:lnTo>
-                    <a:pt x="4583841" y="273362"/>
-                  </a:lnTo>
-                  <a:lnTo>
-                    <a:pt x="4512219" y="258996"/>
-                  </a:lnTo>
-                  <a:lnTo>
-                    <a:pt x="4440596" y="244258"/>
-                  </a:lnTo>
-                  <a:lnTo>
-                    <a:pt x="4368974" y="229140"/>
-                  </a:lnTo>
-                  <a:lnTo>
-                    <a:pt x="4297351" y="213631"/>
-                  </a:lnTo>
-                  <a:lnTo>
-                    <a:pt x="4225729" y="197721"/>
-                  </a:lnTo>
-                  <a:lnTo>
-                    <a:pt x="4154106" y="181400"/>
-                  </a:lnTo>
-                  <a:lnTo>
-                    <a:pt x="4082483" y="164658"/>
-                  </a:lnTo>
-                  <a:lnTo>
-                    <a:pt x="4010861" y="147482"/>
-                  </a:lnTo>
-                  <a:lnTo>
-                    <a:pt x="3939238" y="129863"/>
-                  </a:lnTo>
-                  <a:lnTo>
-                    <a:pt x="3867616" y="111789"/>
-                  </a:lnTo>
-                  <a:lnTo>
-                    <a:pt x="3795993" y="93248"/>
-                  </a:lnTo>
-                  <a:lnTo>
-                    <a:pt x="3724371" y="74228"/>
-                  </a:lnTo>
-                  <a:lnTo>
-                    <a:pt x="3652748" y="54716"/>
-                  </a:lnTo>
-                  <a:lnTo>
-                    <a:pt x="3581126" y="34700"/>
-                  </a:lnTo>
-                  <a:lnTo>
-                    <a:pt x="3509503" y="14167"/>
+                    <a:pt x="7019007" y="594287"/>
+                  </a:lnTo>
+                  <a:lnTo>
+                    <a:pt x="6947385" y="588218"/>
+                  </a:lnTo>
+                  <a:lnTo>
+                    <a:pt x="6875762" y="581992"/>
+                  </a:lnTo>
+                  <a:lnTo>
+                    <a:pt x="6804139" y="575606"/>
+                  </a:lnTo>
+                  <a:lnTo>
+                    <a:pt x="6732517" y="569055"/>
+                  </a:lnTo>
+                  <a:lnTo>
+                    <a:pt x="6660894" y="562334"/>
+                  </a:lnTo>
+                  <a:lnTo>
+                    <a:pt x="6589272" y="555440"/>
+                  </a:lnTo>
+                  <a:lnTo>
+                    <a:pt x="6517649" y="548367"/>
+                  </a:lnTo>
+                  <a:lnTo>
+                    <a:pt x="6446027" y="541112"/>
+                  </a:lnTo>
+                  <a:lnTo>
+                    <a:pt x="6374404" y="533670"/>
+                  </a:lnTo>
+                  <a:lnTo>
+                    <a:pt x="6302782" y="526035"/>
+                  </a:lnTo>
+                  <a:lnTo>
+                    <a:pt x="6231159" y="518203"/>
+                  </a:lnTo>
+                  <a:lnTo>
+                    <a:pt x="6159537" y="510169"/>
+                  </a:lnTo>
+                  <a:lnTo>
+                    <a:pt x="6087914" y="501927"/>
+                  </a:lnTo>
+                  <a:lnTo>
+                    <a:pt x="6016292" y="493472"/>
+                  </a:lnTo>
+                  <a:lnTo>
+                    <a:pt x="5944669" y="484799"/>
+                  </a:lnTo>
+                  <a:lnTo>
+                    <a:pt x="5873047" y="475901"/>
+                  </a:lnTo>
+                  <a:lnTo>
+                    <a:pt x="5801424" y="466774"/>
+                  </a:lnTo>
+                  <a:lnTo>
+                    <a:pt x="5729802" y="457411"/>
+                  </a:lnTo>
+                  <a:lnTo>
+                    <a:pt x="5658179" y="447806"/>
+                  </a:lnTo>
+                  <a:lnTo>
+                    <a:pt x="5586557" y="437953"/>
+                  </a:lnTo>
+                  <a:lnTo>
+                    <a:pt x="5514934" y="427846"/>
+                  </a:lnTo>
+                  <a:lnTo>
+                    <a:pt x="5443311" y="417477"/>
+                  </a:lnTo>
+                  <a:lnTo>
+                    <a:pt x="5371689" y="406841"/>
+                  </a:lnTo>
+                  <a:lnTo>
+                    <a:pt x="5300066" y="395929"/>
+                  </a:lnTo>
+                  <a:lnTo>
+                    <a:pt x="5228444" y="384736"/>
+                  </a:lnTo>
+                  <a:lnTo>
+                    <a:pt x="5156821" y="373254"/>
+                  </a:lnTo>
+                  <a:lnTo>
+                    <a:pt x="5085199" y="361475"/>
+                  </a:lnTo>
+                  <a:lnTo>
+                    <a:pt x="5013576" y="349392"/>
+                  </a:lnTo>
+                  <a:lnTo>
+                    <a:pt x="4941954" y="336996"/>
+                  </a:lnTo>
+                  <a:lnTo>
+                    <a:pt x="4870331" y="324280"/>
+                  </a:lnTo>
+                  <a:lnTo>
+                    <a:pt x="4798709" y="311236"/>
+                  </a:lnTo>
+                  <a:lnTo>
+                    <a:pt x="4727086" y="297855"/>
+                  </a:lnTo>
+                  <a:lnTo>
+                    <a:pt x="4655464" y="284128"/>
+                  </a:lnTo>
+                  <a:lnTo>
+                    <a:pt x="4583841" y="270047"/>
+                  </a:lnTo>
+                  <a:lnTo>
+                    <a:pt x="4512219" y="255602"/>
+                  </a:lnTo>
+                  <a:lnTo>
+                    <a:pt x="4440596" y="240783"/>
+                  </a:lnTo>
+                  <a:lnTo>
+                    <a:pt x="4368974" y="225582"/>
+                  </a:lnTo>
+                  <a:lnTo>
+                    <a:pt x="4297351" y="209988"/>
+                  </a:lnTo>
+                  <a:lnTo>
+                    <a:pt x="4225729" y="193991"/>
+                  </a:lnTo>
+                  <a:lnTo>
+                    <a:pt x="4154106" y="177581"/>
+                  </a:lnTo>
+                  <a:lnTo>
+                    <a:pt x="4082483" y="160747"/>
+                  </a:lnTo>
+                  <a:lnTo>
+                    <a:pt x="4010861" y="143478"/>
+                  </a:lnTo>
+                  <a:lnTo>
+                    <a:pt x="3939238" y="125763"/>
+                  </a:lnTo>
+                  <a:lnTo>
+                    <a:pt x="3867616" y="107591"/>
+                  </a:lnTo>
+                  <a:lnTo>
+                    <a:pt x="3795993" y="88948"/>
+                  </a:lnTo>
+                  <a:lnTo>
+                    <a:pt x="3724371" y="69825"/>
+                  </a:lnTo>
+                  <a:lnTo>
+                    <a:pt x="3652748" y="50207"/>
+                  </a:lnTo>
+                  <a:lnTo>
+                    <a:pt x="3581126" y="30082"/>
+                  </a:lnTo>
+                  <a:lnTo>
+                    <a:pt x="3509503" y="9438"/>
                   </a:lnTo>
                   <a:lnTo>
                     <a:pt x="3437881" y="0"/>
                   </a:lnTo>
                   <a:lnTo>
-                    <a:pt x="3366258" y="362"/>
-                  </a:lnTo>
-                  <a:lnTo>
-                    <a:pt x="3294636" y="724"/>
-                  </a:lnTo>
-                  <a:lnTo>
-                    <a:pt x="3223013" y="1086"/>
-                  </a:lnTo>
-                  <a:lnTo>
-                    <a:pt x="3151391" y="1448"/>
-                  </a:lnTo>
-                  <a:lnTo>
-                    <a:pt x="3079768" y="1810"/>
-                  </a:lnTo>
-                  <a:lnTo>
-                    <a:pt x="3008146" y="2171"/>
-                  </a:lnTo>
-                  <a:lnTo>
-                    <a:pt x="2936523" y="2533"/>
-                  </a:lnTo>
-                  <a:lnTo>
-                    <a:pt x="2864901" y="2894"/>
-                  </a:lnTo>
-                  <a:lnTo>
-                    <a:pt x="2793278" y="3255"/>
-                  </a:lnTo>
-                  <a:lnTo>
-                    <a:pt x="2721655" y="3616"/>
-                  </a:lnTo>
-                  <a:lnTo>
-                    <a:pt x="2650033" y="3977"/>
-                  </a:lnTo>
-                  <a:lnTo>
-                    <a:pt x="2578410" y="4337"/>
-                  </a:lnTo>
-                  <a:lnTo>
-                    <a:pt x="2506788" y="4698"/>
-                  </a:lnTo>
-                  <a:lnTo>
-                    <a:pt x="2435165" y="5058"/>
-                  </a:lnTo>
-                  <a:lnTo>
-                    <a:pt x="2363543" y="5418"/>
-                  </a:lnTo>
-                  <a:lnTo>
-                    <a:pt x="2291920" y="5778"/>
-                  </a:lnTo>
-                  <a:lnTo>
-                    <a:pt x="2220298" y="6138"/>
-                  </a:lnTo>
-                  <a:lnTo>
-                    <a:pt x="2148675" y="6498"/>
-                  </a:lnTo>
-                  <a:lnTo>
-                    <a:pt x="2077053" y="6857"/>
-                  </a:lnTo>
-                  <a:lnTo>
-                    <a:pt x="2005430" y="7216"/>
-                  </a:lnTo>
-                  <a:lnTo>
-                    <a:pt x="1933808" y="7576"/>
-                  </a:lnTo>
-                  <a:lnTo>
-                    <a:pt x="1862185" y="7935"/>
-                  </a:lnTo>
-                  <a:lnTo>
-                    <a:pt x="1790563" y="8294"/>
-                  </a:lnTo>
-                  <a:lnTo>
-                    <a:pt x="1718940" y="8652"/>
-                  </a:lnTo>
-                  <a:lnTo>
-                    <a:pt x="1647318" y="9011"/>
-                  </a:lnTo>
-                  <a:lnTo>
-                    <a:pt x="1575695" y="9369"/>
-                  </a:lnTo>
-                  <a:lnTo>
-                    <a:pt x="1504073" y="9728"/>
-                  </a:lnTo>
-                  <a:lnTo>
-                    <a:pt x="1432450" y="10086"/>
-                  </a:lnTo>
-                  <a:lnTo>
-                    <a:pt x="1360827" y="10444"/>
-                  </a:lnTo>
-                  <a:lnTo>
-                    <a:pt x="1289205" y="10801"/>
-                  </a:lnTo>
-                  <a:lnTo>
-                    <a:pt x="1217582" y="11159"/>
-                  </a:lnTo>
-                  <a:lnTo>
-                    <a:pt x="1145960" y="11516"/>
-                  </a:lnTo>
-                  <a:lnTo>
-                    <a:pt x="1074337" y="11874"/>
-                  </a:lnTo>
-                  <a:lnTo>
-                    <a:pt x="1002715" y="12231"/>
-                  </a:lnTo>
-                  <a:lnTo>
-                    <a:pt x="931092" y="12588"/>
-                  </a:lnTo>
-                  <a:lnTo>
-                    <a:pt x="859470" y="12945"/>
-                  </a:lnTo>
-                  <a:lnTo>
-                    <a:pt x="787847" y="13301"/>
-                  </a:lnTo>
-                  <a:lnTo>
-                    <a:pt x="716225" y="13658"/>
-                  </a:lnTo>
-                  <a:lnTo>
-                    <a:pt x="644602" y="14014"/>
-                  </a:lnTo>
-                  <a:lnTo>
-                    <a:pt x="572980" y="14371"/>
-                  </a:lnTo>
-                  <a:lnTo>
-                    <a:pt x="501357" y="14727"/>
-                  </a:lnTo>
-                  <a:lnTo>
-                    <a:pt x="429735" y="15083"/>
-                  </a:lnTo>
-                  <a:lnTo>
-                    <a:pt x="358112" y="15438"/>
-                  </a:lnTo>
-                  <a:lnTo>
-                    <a:pt x="286490" y="15794"/>
-                  </a:lnTo>
-                  <a:lnTo>
-                    <a:pt x="214867" y="16149"/>
-                  </a:lnTo>
-                  <a:lnTo>
-                    <a:pt x="143245" y="16505"/>
-                  </a:lnTo>
-                  <a:lnTo>
-                    <a:pt x="71622" y="16860"/>
-                  </a:lnTo>
-                  <a:lnTo>
-                    <a:pt x="0" y="17215"/>
+                    <a:pt x="3366258" y="485"/>
+                  </a:lnTo>
+                  <a:lnTo>
+                    <a:pt x="3294636" y="971"/>
+                  </a:lnTo>
+                  <a:lnTo>
+                    <a:pt x="3223013" y="1456"/>
+                  </a:lnTo>
+                  <a:lnTo>
+                    <a:pt x="3151391" y="1941"/>
+                  </a:lnTo>
+                  <a:lnTo>
+                    <a:pt x="3079768" y="2426"/>
+                  </a:lnTo>
+                  <a:lnTo>
+                    <a:pt x="3008146" y="2911"/>
+                  </a:lnTo>
+                  <a:lnTo>
+                    <a:pt x="2936523" y="3395"/>
+                  </a:lnTo>
+                  <a:lnTo>
+                    <a:pt x="2864901" y="3879"/>
+                  </a:lnTo>
+                  <a:lnTo>
+                    <a:pt x="2793278" y="4362"/>
+                  </a:lnTo>
+                  <a:lnTo>
+                    <a:pt x="2721655" y="4846"/>
+                  </a:lnTo>
+                  <a:lnTo>
+                    <a:pt x="2650033" y="5329"/>
+                  </a:lnTo>
+                  <a:lnTo>
+                    <a:pt x="2578410" y="5811"/>
+                  </a:lnTo>
+                  <a:lnTo>
+                    <a:pt x="2506788" y="6294"/>
+                  </a:lnTo>
+                  <a:lnTo>
+                    <a:pt x="2435165" y="6776"/>
+                  </a:lnTo>
+                  <a:lnTo>
+                    <a:pt x="2363543" y="7258"/>
+                  </a:lnTo>
+                  <a:lnTo>
+                    <a:pt x="2291920" y="7740"/>
+                  </a:lnTo>
+                  <a:lnTo>
+                    <a:pt x="2220298" y="8221"/>
+                  </a:lnTo>
+                  <a:lnTo>
+                    <a:pt x="2148675" y="8702"/>
+                  </a:lnTo>
+                  <a:lnTo>
+                    <a:pt x="2077053" y="9183"/>
+                  </a:lnTo>
+                  <a:lnTo>
+                    <a:pt x="2005430" y="9663"/>
+                  </a:lnTo>
+                  <a:lnTo>
+                    <a:pt x="1933808" y="10144"/>
+                  </a:lnTo>
+                  <a:lnTo>
+                    <a:pt x="1862185" y="10623"/>
+                  </a:lnTo>
+                  <a:lnTo>
+                    <a:pt x="1790563" y="11103"/>
+                  </a:lnTo>
+                  <a:lnTo>
+                    <a:pt x="1718940" y="11583"/>
+                  </a:lnTo>
+                  <a:lnTo>
+                    <a:pt x="1647318" y="12062"/>
+                  </a:lnTo>
+                  <a:lnTo>
+                    <a:pt x="1575695" y="12540"/>
+                  </a:lnTo>
+                  <a:lnTo>
+                    <a:pt x="1504073" y="13019"/>
+                  </a:lnTo>
+                  <a:lnTo>
+                    <a:pt x="1432450" y="13497"/>
+                  </a:lnTo>
+                  <a:lnTo>
+                    <a:pt x="1360827" y="13975"/>
+                  </a:lnTo>
+                  <a:lnTo>
+                    <a:pt x="1289205" y="14453"/>
+                  </a:lnTo>
+                  <a:lnTo>
+                    <a:pt x="1217582" y="14930"/>
+                  </a:lnTo>
+                  <a:lnTo>
+                    <a:pt x="1145960" y="15407"/>
+                  </a:lnTo>
+                  <a:lnTo>
+                    <a:pt x="1074337" y="15884"/>
+                  </a:lnTo>
+                  <a:lnTo>
+                    <a:pt x="1002715" y="16361"/>
+                  </a:lnTo>
+                  <a:lnTo>
+                    <a:pt x="931092" y="16837"/>
+                  </a:lnTo>
+                  <a:lnTo>
+                    <a:pt x="859470" y="17313"/>
+                  </a:lnTo>
+                  <a:lnTo>
+                    <a:pt x="787847" y="17789"/>
+                  </a:lnTo>
+                  <a:lnTo>
+                    <a:pt x="716225" y="18264"/>
+                  </a:lnTo>
+                  <a:lnTo>
+                    <a:pt x="644602" y="18740"/>
+                  </a:lnTo>
+                  <a:lnTo>
+                    <a:pt x="572980" y="19215"/>
+                  </a:lnTo>
+                  <a:lnTo>
+                    <a:pt x="501357" y="19689"/>
+                  </a:lnTo>
+                  <a:lnTo>
+                    <a:pt x="429735" y="20163"/>
+                  </a:lnTo>
+                  <a:lnTo>
+                    <a:pt x="358112" y="20638"/>
+                  </a:lnTo>
+                  <a:lnTo>
+                    <a:pt x="286490" y="21111"/>
+                  </a:lnTo>
+                  <a:lnTo>
+                    <a:pt x="214867" y="21585"/>
+                  </a:lnTo>
+                  <a:lnTo>
+                    <a:pt x="143245" y="22058"/>
+                  </a:lnTo>
+                  <a:lnTo>
+                    <a:pt x="71622" y="22531"/>
+                  </a:lnTo>
+                  <a:lnTo>
+                    <a:pt x="0" y="23004"/>
                   </a:lnTo>
                 </a:path>
               </a:pathLst>
@@ -4670,312 +4670,312 @@
           </p:nvSpPr>
           <p:spPr>
             <a:xfrm>
-              <a:off x="1172049" y="4037105"/>
-              <a:ext cx="7090630" cy="1080754"/>
+              <a:off x="1172049" y="4038611"/>
+              <a:ext cx="7090630" cy="1076317"/>
             </a:xfrm>
             <a:custGeom>
               <a:avLst/>
               <a:pathLst>
-                <a:path w="7090630" h="1080754">
+                <a:path w="7090630" h="1076317">
                   <a:moveTo>
                     <a:pt x="0" y="0"/>
                   </a:moveTo>
                   <a:lnTo>
-                    <a:pt x="71622" y="18939"/>
-                  </a:lnTo>
-                  <a:lnTo>
-                    <a:pt x="143245" y="37642"/>
-                  </a:lnTo>
-                  <a:lnTo>
-                    <a:pt x="214867" y="56112"/>
-                  </a:lnTo>
-                  <a:lnTo>
-                    <a:pt x="286490" y="74352"/>
-                  </a:lnTo>
-                  <a:lnTo>
-                    <a:pt x="358112" y="92365"/>
-                  </a:lnTo>
-                  <a:lnTo>
-                    <a:pt x="429735" y="110154"/>
-                  </a:lnTo>
-                  <a:lnTo>
-                    <a:pt x="501357" y="127721"/>
-                  </a:lnTo>
-                  <a:lnTo>
-                    <a:pt x="572980" y="145069"/>
-                  </a:lnTo>
-                  <a:lnTo>
-                    <a:pt x="644602" y="162200"/>
-                  </a:lnTo>
-                  <a:lnTo>
-                    <a:pt x="716225" y="179119"/>
-                  </a:lnTo>
-                  <a:lnTo>
-                    <a:pt x="787847" y="195826"/>
-                  </a:lnTo>
-                  <a:lnTo>
-                    <a:pt x="859470" y="212326"/>
-                  </a:lnTo>
-                  <a:lnTo>
-                    <a:pt x="931092" y="228620"/>
-                  </a:lnTo>
-                  <a:lnTo>
-                    <a:pt x="1002715" y="244711"/>
-                  </a:lnTo>
-                  <a:lnTo>
-                    <a:pt x="1074337" y="260601"/>
-                  </a:lnTo>
-                  <a:lnTo>
-                    <a:pt x="1145960" y="276293"/>
-                  </a:lnTo>
-                  <a:lnTo>
-                    <a:pt x="1217582" y="291790"/>
-                  </a:lnTo>
-                  <a:lnTo>
-                    <a:pt x="1289205" y="307094"/>
-                  </a:lnTo>
-                  <a:lnTo>
-                    <a:pt x="1360827" y="322207"/>
-                  </a:lnTo>
-                  <a:lnTo>
-                    <a:pt x="1432450" y="337132"/>
-                  </a:lnTo>
-                  <a:lnTo>
-                    <a:pt x="1504073" y="351871"/>
-                  </a:lnTo>
-                  <a:lnTo>
-                    <a:pt x="1575695" y="366427"/>
-                  </a:lnTo>
-                  <a:lnTo>
-                    <a:pt x="1647318" y="380801"/>
-                  </a:lnTo>
-                  <a:lnTo>
-                    <a:pt x="1718940" y="394995"/>
-                  </a:lnTo>
-                  <a:lnTo>
-                    <a:pt x="1790563" y="409014"/>
-                  </a:lnTo>
-                  <a:lnTo>
-                    <a:pt x="1862185" y="422857"/>
-                  </a:lnTo>
-                  <a:lnTo>
-                    <a:pt x="1933808" y="436528"/>
-                  </a:lnTo>
-                  <a:lnTo>
-                    <a:pt x="2005430" y="450028"/>
-                  </a:lnTo>
-                  <a:lnTo>
-                    <a:pt x="2077053" y="463361"/>
-                  </a:lnTo>
-                  <a:lnTo>
-                    <a:pt x="2148675" y="476527"/>
-                  </a:lnTo>
-                  <a:lnTo>
-                    <a:pt x="2220298" y="489529"/>
-                  </a:lnTo>
-                  <a:lnTo>
-                    <a:pt x="2291920" y="502370"/>
-                  </a:lnTo>
-                  <a:lnTo>
-                    <a:pt x="2363543" y="515050"/>
-                  </a:lnTo>
-                  <a:lnTo>
-                    <a:pt x="2435165" y="527572"/>
-                  </a:lnTo>
-                  <a:lnTo>
-                    <a:pt x="2506788" y="539938"/>
-                  </a:lnTo>
-                  <a:lnTo>
-                    <a:pt x="2578410" y="552151"/>
-                  </a:lnTo>
-                  <a:lnTo>
-                    <a:pt x="2650033" y="564211"/>
-                  </a:lnTo>
-                  <a:lnTo>
-                    <a:pt x="2721655" y="576121"/>
-                  </a:lnTo>
-                  <a:lnTo>
-                    <a:pt x="2793278" y="587882"/>
-                  </a:lnTo>
-                  <a:lnTo>
-                    <a:pt x="2864901" y="599497"/>
-                  </a:lnTo>
-                  <a:lnTo>
-                    <a:pt x="2936523" y="610967"/>
-                  </a:lnTo>
-                  <a:lnTo>
-                    <a:pt x="3008146" y="622294"/>
-                  </a:lnTo>
-                  <a:lnTo>
-                    <a:pt x="3079768" y="633481"/>
-                  </a:lnTo>
-                  <a:lnTo>
-                    <a:pt x="3151391" y="644527"/>
-                  </a:lnTo>
-                  <a:lnTo>
-                    <a:pt x="3223013" y="655437"/>
-                  </a:lnTo>
-                  <a:lnTo>
-                    <a:pt x="3294636" y="666210"/>
-                  </a:lnTo>
-                  <a:lnTo>
-                    <a:pt x="3366258" y="676849"/>
-                  </a:lnTo>
-                  <a:lnTo>
-                    <a:pt x="3437881" y="687355"/>
-                  </a:lnTo>
-                  <a:lnTo>
-                    <a:pt x="3509503" y="697731"/>
-                  </a:lnTo>
-                  <a:lnTo>
-                    <a:pt x="3581126" y="707977"/>
-                  </a:lnTo>
-                  <a:lnTo>
-                    <a:pt x="3652748" y="718096"/>
-                  </a:lnTo>
-                  <a:lnTo>
-                    <a:pt x="3724371" y="728088"/>
-                  </a:lnTo>
-                  <a:lnTo>
-                    <a:pt x="3795993" y="737957"/>
-                  </a:lnTo>
-                  <a:lnTo>
-                    <a:pt x="3867616" y="747702"/>
-                  </a:lnTo>
-                  <a:lnTo>
-                    <a:pt x="3939238" y="757325"/>
-                  </a:lnTo>
-                  <a:lnTo>
-                    <a:pt x="4010861" y="766829"/>
-                  </a:lnTo>
-                  <a:lnTo>
-                    <a:pt x="4082483" y="776215"/>
-                  </a:lnTo>
-                  <a:lnTo>
-                    <a:pt x="4154106" y="785483"/>
-                  </a:lnTo>
-                  <a:lnTo>
-                    <a:pt x="4225729" y="794636"/>
-                  </a:lnTo>
-                  <a:lnTo>
-                    <a:pt x="4297351" y="803675"/>
-                  </a:lnTo>
-                  <a:lnTo>
-                    <a:pt x="4368974" y="812602"/>
-                  </a:lnTo>
-                  <a:lnTo>
-                    <a:pt x="4440596" y="821417"/>
-                  </a:lnTo>
-                  <a:lnTo>
-                    <a:pt x="4512219" y="830122"/>
-                  </a:lnTo>
-                  <a:lnTo>
-                    <a:pt x="4583841" y="838719"/>
-                  </a:lnTo>
-                  <a:lnTo>
-                    <a:pt x="4655464" y="847209"/>
-                  </a:lnTo>
-                  <a:lnTo>
-                    <a:pt x="4727086" y="855593"/>
-                  </a:lnTo>
-                  <a:lnTo>
-                    <a:pt x="4798709" y="863872"/>
-                  </a:lnTo>
-                  <a:lnTo>
-                    <a:pt x="4870331" y="872049"/>
-                  </a:lnTo>
-                  <a:lnTo>
-                    <a:pt x="4941954" y="880123"/>
-                  </a:lnTo>
-                  <a:lnTo>
-                    <a:pt x="5013576" y="888097"/>
-                  </a:lnTo>
-                  <a:lnTo>
-                    <a:pt x="5085199" y="895972"/>
-                  </a:lnTo>
-                  <a:lnTo>
-                    <a:pt x="5156821" y="903748"/>
-                  </a:lnTo>
-                  <a:lnTo>
-                    <a:pt x="5228444" y="911428"/>
-                  </a:lnTo>
-                  <a:lnTo>
-                    <a:pt x="5300066" y="919012"/>
-                  </a:lnTo>
-                  <a:lnTo>
-                    <a:pt x="5371689" y="926501"/>
-                  </a:lnTo>
-                  <a:lnTo>
-                    <a:pt x="5443311" y="933897"/>
-                  </a:lnTo>
-                  <a:lnTo>
-                    <a:pt x="5514934" y="941201"/>
-                  </a:lnTo>
-                  <a:lnTo>
-                    <a:pt x="5586557" y="948414"/>
-                  </a:lnTo>
-                  <a:lnTo>
-                    <a:pt x="5658179" y="955537"/>
-                  </a:lnTo>
-                  <a:lnTo>
-                    <a:pt x="5729802" y="962571"/>
-                  </a:lnTo>
-                  <a:lnTo>
-                    <a:pt x="5801424" y="969518"/>
-                  </a:lnTo>
-                  <a:lnTo>
-                    <a:pt x="5873047" y="976378"/>
-                  </a:lnTo>
-                  <a:lnTo>
-                    <a:pt x="5944669" y="983153"/>
-                  </a:lnTo>
-                  <a:lnTo>
-                    <a:pt x="6016292" y="989843"/>
-                  </a:lnTo>
-                  <a:lnTo>
-                    <a:pt x="6087914" y="996450"/>
-                  </a:lnTo>
-                  <a:lnTo>
-                    <a:pt x="6159537" y="1002975"/>
-                  </a:lnTo>
-                  <a:lnTo>
-                    <a:pt x="6231159" y="1009418"/>
-                  </a:lnTo>
-                  <a:lnTo>
-                    <a:pt x="6302782" y="1015781"/>
-                  </a:lnTo>
-                  <a:lnTo>
-                    <a:pt x="6374404" y="1022065"/>
-                  </a:lnTo>
-                  <a:lnTo>
-                    <a:pt x="6446027" y="1028270"/>
-                  </a:lnTo>
-                  <a:lnTo>
-                    <a:pt x="6517649" y="1034399"/>
-                  </a:lnTo>
-                  <a:lnTo>
-                    <a:pt x="6589272" y="1040450"/>
-                  </a:lnTo>
-                  <a:lnTo>
-                    <a:pt x="6660894" y="1046427"/>
-                  </a:lnTo>
-                  <a:lnTo>
-                    <a:pt x="6732517" y="1052329"/>
-                  </a:lnTo>
-                  <a:lnTo>
-                    <a:pt x="6804139" y="1058157"/>
-                  </a:lnTo>
-                  <a:lnTo>
-                    <a:pt x="6875762" y="1063913"/>
-                  </a:lnTo>
-                  <a:lnTo>
-                    <a:pt x="6947385" y="1069597"/>
-                  </a:lnTo>
-                  <a:lnTo>
-                    <a:pt x="7019007" y="1075210"/>
-                  </a:lnTo>
-                  <a:lnTo>
-                    <a:pt x="7090630" y="1080754"/>
+                    <a:pt x="71622" y="18804"/>
+                  </a:lnTo>
+                  <a:lnTo>
+                    <a:pt x="143245" y="37376"/>
+                  </a:lnTo>
+                  <a:lnTo>
+                    <a:pt x="214867" y="55718"/>
+                  </a:lnTo>
+                  <a:lnTo>
+                    <a:pt x="286490" y="73833"/>
+                  </a:lnTo>
+                  <a:lnTo>
+                    <a:pt x="358112" y="91723"/>
+                  </a:lnTo>
+                  <a:lnTo>
+                    <a:pt x="429735" y="109392"/>
+                  </a:lnTo>
+                  <a:lnTo>
+                    <a:pt x="501357" y="126843"/>
+                  </a:lnTo>
+                  <a:lnTo>
+                    <a:pt x="572980" y="144077"/>
+                  </a:lnTo>
+                  <a:lnTo>
+                    <a:pt x="644602" y="161097"/>
+                  </a:lnTo>
+                  <a:lnTo>
+                    <a:pt x="716225" y="177907"/>
+                  </a:lnTo>
+                  <a:lnTo>
+                    <a:pt x="787847" y="194509"/>
+                  </a:lnTo>
+                  <a:lnTo>
+                    <a:pt x="859470" y="210905"/>
+                  </a:lnTo>
+                  <a:lnTo>
+                    <a:pt x="931092" y="227098"/>
+                  </a:lnTo>
+                  <a:lnTo>
+                    <a:pt x="1002715" y="243091"/>
+                  </a:lnTo>
+                  <a:lnTo>
+                    <a:pt x="1074337" y="258886"/>
+                  </a:lnTo>
+                  <a:lnTo>
+                    <a:pt x="1145960" y="274485"/>
+                  </a:lnTo>
+                  <a:lnTo>
+                    <a:pt x="1217582" y="289891"/>
+                  </a:lnTo>
+                  <a:lnTo>
+                    <a:pt x="1289205" y="305106"/>
+                  </a:lnTo>
+                  <a:lnTo>
+                    <a:pt x="1360827" y="320133"/>
+                  </a:lnTo>
+                  <a:lnTo>
+                    <a:pt x="1432450" y="334973"/>
+                  </a:lnTo>
+                  <a:lnTo>
+                    <a:pt x="1504073" y="349630"/>
+                  </a:lnTo>
+                  <a:lnTo>
+                    <a:pt x="1575695" y="364106"/>
+                  </a:lnTo>
+                  <a:lnTo>
+                    <a:pt x="1647318" y="378402"/>
+                  </a:lnTo>
+                  <a:lnTo>
+                    <a:pt x="1718940" y="392521"/>
+                  </a:lnTo>
+                  <a:lnTo>
+                    <a:pt x="1790563" y="406465"/>
+                  </a:lnTo>
+                  <a:lnTo>
+                    <a:pt x="1862185" y="420237"/>
+                  </a:lnTo>
+                  <a:lnTo>
+                    <a:pt x="1933808" y="433838"/>
+                  </a:lnTo>
+                  <a:lnTo>
+                    <a:pt x="2005430" y="447271"/>
+                  </a:lnTo>
+                  <a:lnTo>
+                    <a:pt x="2077053" y="460537"/>
+                  </a:lnTo>
+                  <a:lnTo>
+                    <a:pt x="2148675" y="473639"/>
+                  </a:lnTo>
+                  <a:lnTo>
+                    <a:pt x="2220298" y="486579"/>
+                  </a:lnTo>
+                  <a:lnTo>
+                    <a:pt x="2291920" y="499358"/>
+                  </a:lnTo>
+                  <a:lnTo>
+                    <a:pt x="2363543" y="511980"/>
+                  </a:lnTo>
+                  <a:lnTo>
+                    <a:pt x="2435165" y="524445"/>
+                  </a:lnTo>
+                  <a:lnTo>
+                    <a:pt x="2506788" y="536756"/>
+                  </a:lnTo>
+                  <a:lnTo>
+                    <a:pt x="2578410" y="548914"/>
+                  </a:lnTo>
+                  <a:lnTo>
+                    <a:pt x="2650033" y="560922"/>
+                  </a:lnTo>
+                  <a:lnTo>
+                    <a:pt x="2721655" y="572781"/>
+                  </a:lnTo>
+                  <a:lnTo>
+                    <a:pt x="2793278" y="584493"/>
+                  </a:lnTo>
+                  <a:lnTo>
+                    <a:pt x="2864901" y="596060"/>
+                  </a:lnTo>
+                  <a:lnTo>
+                    <a:pt x="2936523" y="607484"/>
+                  </a:lnTo>
+                  <a:lnTo>
+                    <a:pt x="3008146" y="618767"/>
+                  </a:lnTo>
+                  <a:lnTo>
+                    <a:pt x="3079768" y="629909"/>
+                  </a:lnTo>
+                  <a:lnTo>
+                    <a:pt x="3151391" y="640914"/>
+                  </a:lnTo>
+                  <a:lnTo>
+                    <a:pt x="3223013" y="651783"/>
+                  </a:lnTo>
+                  <a:lnTo>
+                    <a:pt x="3294636" y="662517"/>
+                  </a:lnTo>
+                  <a:lnTo>
+                    <a:pt x="3366258" y="673118"/>
+                  </a:lnTo>
+                  <a:lnTo>
+                    <a:pt x="3437881" y="683587"/>
+                  </a:lnTo>
+                  <a:lnTo>
+                    <a:pt x="3509503" y="693928"/>
+                  </a:lnTo>
+                  <a:lnTo>
+                    <a:pt x="3581126" y="704140"/>
+                  </a:lnTo>
+                  <a:lnTo>
+                    <a:pt x="3652748" y="714225"/>
+                  </a:lnTo>
+                  <a:lnTo>
+                    <a:pt x="3724371" y="724186"/>
+                  </a:lnTo>
+                  <a:lnTo>
+                    <a:pt x="3795993" y="734023"/>
+                  </a:lnTo>
+                  <a:lnTo>
+                    <a:pt x="3867616" y="743739"/>
+                  </a:lnTo>
+                  <a:lnTo>
+                    <a:pt x="3939238" y="753334"/>
+                  </a:lnTo>
+                  <a:lnTo>
+                    <a:pt x="4010861" y="762811"/>
+                  </a:lnTo>
+                  <a:lnTo>
+                    <a:pt x="4082483" y="772170"/>
+                  </a:lnTo>
+                  <a:lnTo>
+                    <a:pt x="4154106" y="781413"/>
+                  </a:lnTo>
+                  <a:lnTo>
+                    <a:pt x="4225729" y="790542"/>
+                  </a:lnTo>
+                  <a:lnTo>
+                    <a:pt x="4297351" y="799558"/>
+                  </a:lnTo>
+                  <a:lnTo>
+                    <a:pt x="4368974" y="808462"/>
+                  </a:lnTo>
+                  <a:lnTo>
+                    <a:pt x="4440596" y="817256"/>
+                  </a:lnTo>
+                  <a:lnTo>
+                    <a:pt x="4512219" y="825941"/>
+                  </a:lnTo>
+                  <a:lnTo>
+                    <a:pt x="4583841" y="834518"/>
+                  </a:lnTo>
+                  <a:lnTo>
+                    <a:pt x="4655464" y="842989"/>
+                  </a:lnTo>
+                  <a:lnTo>
+                    <a:pt x="4727086" y="851356"/>
+                  </a:lnTo>
+                  <a:lnTo>
+                    <a:pt x="4798709" y="859618"/>
+                  </a:lnTo>
+                  <a:lnTo>
+                    <a:pt x="4870331" y="867779"/>
+                  </a:lnTo>
+                  <a:lnTo>
+                    <a:pt x="4941954" y="875838"/>
+                  </a:lnTo>
+                  <a:lnTo>
+                    <a:pt x="5013576" y="883798"/>
+                  </a:lnTo>
+                  <a:lnTo>
+                    <a:pt x="5085199" y="891659"/>
+                  </a:lnTo>
+                  <a:lnTo>
+                    <a:pt x="5156821" y="899422"/>
+                  </a:lnTo>
+                  <a:lnTo>
+                    <a:pt x="5228444" y="907090"/>
+                  </a:lnTo>
+                  <a:lnTo>
+                    <a:pt x="5300066" y="914662"/>
+                  </a:lnTo>
+                  <a:lnTo>
+                    <a:pt x="5371689" y="922141"/>
+                  </a:lnTo>
+                  <a:lnTo>
+                    <a:pt x="5443311" y="929527"/>
+                  </a:lnTo>
+                  <a:lnTo>
+                    <a:pt x="5514934" y="936822"/>
+                  </a:lnTo>
+                  <a:lnTo>
+                    <a:pt x="5586557" y="944027"/>
+                  </a:lnTo>
+                  <a:lnTo>
+                    <a:pt x="5658179" y="951142"/>
+                  </a:lnTo>
+                  <a:lnTo>
+                    <a:pt x="5729802" y="958169"/>
+                  </a:lnTo>
+                  <a:lnTo>
+                    <a:pt x="5801424" y="965109"/>
+                  </a:lnTo>
+                  <a:lnTo>
+                    <a:pt x="5873047" y="971963"/>
+                  </a:lnTo>
+                  <a:lnTo>
+                    <a:pt x="5944669" y="978732"/>
+                  </a:lnTo>
+                  <a:lnTo>
+                    <a:pt x="6016292" y="985418"/>
+                  </a:lnTo>
+                  <a:lnTo>
+                    <a:pt x="6087914" y="992021"/>
+                  </a:lnTo>
+                  <a:lnTo>
+                    <a:pt x="6159537" y="998541"/>
+                  </a:lnTo>
+                  <a:lnTo>
+                    <a:pt x="6231159" y="1004982"/>
+                  </a:lnTo>
+                  <a:lnTo>
+                    <a:pt x="6302782" y="1011342"/>
+                  </a:lnTo>
+                  <a:lnTo>
+                    <a:pt x="6374404" y="1017624"/>
+                  </a:lnTo>
+                  <a:lnTo>
+                    <a:pt x="6446027" y="1023828"/>
+                  </a:lnTo>
+                  <a:lnTo>
+                    <a:pt x="6517649" y="1029955"/>
+                  </a:lnTo>
+                  <a:lnTo>
+                    <a:pt x="6589272" y="1036006"/>
+                  </a:lnTo>
+                  <a:lnTo>
+                    <a:pt x="6660894" y="1041982"/>
+                  </a:lnTo>
+                  <a:lnTo>
+                    <a:pt x="6732517" y="1047884"/>
+                  </a:lnTo>
+                  <a:lnTo>
+                    <a:pt x="6804139" y="1053714"/>
+                  </a:lnTo>
+                  <a:lnTo>
+                    <a:pt x="6875762" y="1059471"/>
+                  </a:lnTo>
+                  <a:lnTo>
+                    <a:pt x="6947385" y="1065156"/>
+                  </a:lnTo>
+                  <a:lnTo>
+                    <a:pt x="7019007" y="1070772"/>
+                  </a:lnTo>
+                  <a:lnTo>
+                    <a:pt x="7090630" y="1076317"/>
                   </a:lnTo>
                 </a:path>
               </a:pathLst>
@@ -5047,7 +5047,7 @@
           </p:nvSpPr>
           <p:spPr>
             <a:xfrm>
-              <a:off x="4632789" y="2073503"/>
+              <a:off x="4648520" y="2073503"/>
               <a:ext cx="0" cy="3649639"/>
             </a:xfrm>
             <a:custGeom>
@@ -5090,7 +5090,7 @@
           </p:nvSpPr>
           <p:spPr>
             <a:xfrm>
-              <a:off x="3519238" y="2073503"/>
+              <a:off x="3510041" y="2073503"/>
               <a:ext cx="0" cy="3649639"/>
             </a:xfrm>
             <a:custGeom>
@@ -5133,7 +5133,7 @@
           </p:nvSpPr>
           <p:spPr>
             <a:xfrm>
-              <a:off x="5667105" y="2073503"/>
+              <a:off x="5671562" y="2073503"/>
               <a:ext cx="0" cy="3649639"/>
             </a:xfrm>
             <a:custGeom>
@@ -5406,7 +5406,7 @@
           </p:nvSpPr>
           <p:spPr>
             <a:xfrm>
-              <a:off x="787919" y="5785772"/>
+              <a:off x="789147" y="5785772"/>
               <a:ext cx="161574" cy="80101"/>
             </a:xfrm>
             <a:prstGeom prst="rect">
@@ -5452,7 +5452,7 @@
           </p:nvSpPr>
           <p:spPr>
             <a:xfrm>
-              <a:off x="1701509" y="5785772"/>
+              <a:off x="1701133" y="5785772"/>
               <a:ext cx="161574" cy="80101"/>
             </a:xfrm>
             <a:prstGeom prst="rect">
@@ -5498,7 +5498,7 @@
           </p:nvSpPr>
           <p:spPr>
             <a:xfrm>
-              <a:off x="2615100" y="5785772"/>
+              <a:off x="2613120" y="5785772"/>
               <a:ext cx="161574" cy="80101"/>
             </a:xfrm>
             <a:prstGeom prst="rect">
@@ -5544,7 +5544,7 @@
           </p:nvSpPr>
           <p:spPr>
             <a:xfrm>
-              <a:off x="3528691" y="5785772"/>
+              <a:off x="3525106" y="5785772"/>
               <a:ext cx="161574" cy="80101"/>
             </a:xfrm>
             <a:prstGeom prst="rect">
@@ -5590,7 +5590,7 @@
           </p:nvSpPr>
           <p:spPr>
             <a:xfrm>
-              <a:off x="4442282" y="5785772"/>
+              <a:off x="4437092" y="5785772"/>
               <a:ext cx="161574" cy="80101"/>
             </a:xfrm>
             <a:prstGeom prst="rect">
@@ -5636,7 +5636,7 @@
           </p:nvSpPr>
           <p:spPr>
             <a:xfrm>
-              <a:off x="5405571" y="5785772"/>
+              <a:off x="5398776" y="5785772"/>
               <a:ext cx="62179" cy="80101"/>
             </a:xfrm>
             <a:prstGeom prst="rect">
@@ -5682,7 +5682,7 @@
           </p:nvSpPr>
           <p:spPr>
             <a:xfrm>
-              <a:off x="6288072" y="5785772"/>
+              <a:off x="6279673" y="5785772"/>
               <a:ext cx="124358" cy="80101"/>
             </a:xfrm>
             <a:prstGeom prst="rect">
@@ -5728,7 +5728,7 @@
           </p:nvSpPr>
           <p:spPr>
             <a:xfrm>
-              <a:off x="7201663" y="5785772"/>
+              <a:off x="7191659" y="5785772"/>
               <a:ext cx="124358" cy="80101"/>
             </a:xfrm>
             <a:prstGeom prst="rect">
@@ -5774,7 +5774,7 @@
           </p:nvSpPr>
           <p:spPr>
             <a:xfrm>
-              <a:off x="8115254" y="5785772"/>
+              <a:off x="8103645" y="5785772"/>
               <a:ext cx="124358" cy="80101"/>
             </a:xfrm>
             <a:prstGeom prst="rect">
@@ -5945,7 +5945,7 @@
                   <a:latin typeface="Helvetica"/>
                   <a:cs typeface="Helvetica"/>
                 </a:rPr>
-                <a:t>subHR per 10 % decline: 1.17 (0.99-1.38), p_Bonf = 0.349 (n = 6)  |  per IQR decline (Δ = 23.5 %): 1.46 (0.99-2.15)  |  IQR: [-21.0, 2.5] %</a:t>
+                <a:t>subHR per 10 % decline: 1.17 (0.99-1.38), p_Bonf = 0.367 (n = 6)  |  per IQR decline (Δ = 23.7 %): 1.46 (0.98-2.16)  |  IQR: [-21.1, 2.7] %</a:t>
               </a:r>
             </a:p>
           </p:txBody>
